--- a/3일차_실습3_latest.pptx
+++ b/3일차_실습3_latest.pptx
@@ -14057,7 +14057,7 @@
           <p:nvPr>
             <p:extLst>
               <p:ext uri="{D42A27DB-BD31-4B8C-83A1-F6EECF244321}">
-                <p14:modId xmlns:p14="http://schemas.microsoft.com/office/powerpoint/2010/main" val="3949381605"/>
+                <p14:modId xmlns:p14="http://schemas.microsoft.com/office/powerpoint/2010/main" val="3220780495"/>
               </p:ext>
             </p:extLst>
           </p:nvPr>
@@ -14472,7 +14472,18 @@
                           <a:ea typeface="Arial" pitchFamily="34" charset="-122"/>
                           <a:cs typeface="Arial" pitchFamily="34" charset="-120"/>
                         </a:rPr>
-                        <a:t>Garak — DAN Jailbreak (6종)</a:t>
+                        <a:t>Garak — DAN Jailbreak </a:t>
+                      </a:r>
+                      <a:r>
+                        <a:rPr lang="ko-KR" altLang="en-US" sz="1050">
+                          <a:solidFill>
+                            <a:srgbClr val="000000"/>
+                          </a:solidFill>
+                          <a:latin typeface="Arial" pitchFamily="34" charset="0"/>
+                          <a:ea typeface="Arial" pitchFamily="34" charset="-122"/>
+                          <a:cs typeface="Arial" pitchFamily="34" charset="-120"/>
+                        </a:rPr>
+                        <a:t>외</a:t>
                       </a:r>
                       <a:endParaRPr lang="en-US" sz="1050" dirty="0">
                         <a:latin typeface="Arial" charset="0"/>
@@ -16577,9 +16588,6 @@
           <a:bodyPr wrap="square" rtlCol="0" anchor="ctr"/>
           <a:lstStyle/>
           <a:p>
-            <a:pPr marL="0" indent="0">
-              <a:buNone/>
-            </a:pPr>
             <a:r>
               <a:rPr lang="en-US" sz="950" dirty="0">
                 <a:solidFill>
@@ -16589,38 +16597,10 @@
                 <a:ea typeface="Arial" pitchFamily="34" charset="-122"/>
                 <a:cs typeface="Arial" pitchFamily="34" charset="-120"/>
               </a:rPr>
-              <a:t>!pip install -q garak</a:t>
-            </a:r>
-            <a:endParaRPr lang="en-US" sz="950" dirty="0"/>
-          </a:p>
-        </p:txBody>
-      </p:sp>
-      <p:sp>
-        <p:nvSpPr>
-          <p:cNvPr id="14" name="Text 12"/>
-          <p:cNvSpPr/>
-          <p:nvPr/>
-        </p:nvSpPr>
-        <p:spPr>
-          <a:xfrm>
-            <a:off x="411480" y="2706624"/>
-            <a:ext cx="5212080" cy="246888"/>
-          </a:xfrm>
-          <a:prstGeom prst="rect">
-            <a:avLst/>
-          </a:prstGeom>
-          <a:noFill/>
-          <a:ln/>
-        </p:spPr>
-        <p:txBody>
-          <a:bodyPr wrap="square" rtlCol="0" anchor="ctr"/>
-          <a:lstStyle/>
-          <a:p>
-            <a:pPr marL="0" indent="0">
-              <a:buNone/>
-            </a:pPr>
-            <a:r>
-              <a:rPr lang="en-US" sz="950" dirty="0">
+              <a:t>!pip install -q </a:t>
+            </a:r>
+            <a:r>
+              <a:rPr lang="en-US" sz="950" dirty="0" err="1">
                 <a:solidFill>
                   <a:srgbClr val="111848"/>
                 </a:solidFill>
@@ -16628,7 +16608,101 @@
                 <a:ea typeface="Arial" pitchFamily="34" charset="-122"/>
                 <a:cs typeface="Arial" pitchFamily="34" charset="-120"/>
               </a:rPr>
-              <a:t>             google-genai python-dotenv</a:t>
+              <a:t>garak</a:t>
+            </a:r>
+            <a:r>
+              <a:rPr lang="en-US" sz="950" dirty="0">
+                <a:solidFill>
+                  <a:srgbClr val="111848"/>
+                </a:solidFill>
+                <a:latin typeface="Arial" pitchFamily="34" charset="0"/>
+                <a:ea typeface="Arial" pitchFamily="34" charset="-122"/>
+                <a:cs typeface="Arial" pitchFamily="34" charset="-120"/>
+              </a:rPr>
+              <a:t> </a:t>
+            </a:r>
+            <a:r>
+              <a:rPr lang="en-US" altLang="ko-KR" sz="950" dirty="0">
+                <a:solidFill>
+                  <a:srgbClr val="111848"/>
+                </a:solidFill>
+                <a:latin typeface="Arial" pitchFamily="34" charset="0"/>
+                <a:ea typeface="Arial" pitchFamily="34" charset="-122"/>
+                <a:cs typeface="Arial" pitchFamily="34" charset="-120"/>
+              </a:rPr>
+              <a:t>google-</a:t>
+            </a:r>
+            <a:r>
+              <a:rPr lang="en-US" altLang="ko-KR" sz="950" dirty="0" err="1">
+                <a:solidFill>
+                  <a:srgbClr val="111848"/>
+                </a:solidFill>
+                <a:latin typeface="Arial" pitchFamily="34" charset="0"/>
+                <a:ea typeface="Arial" pitchFamily="34" charset="-122"/>
+                <a:cs typeface="Arial" pitchFamily="34" charset="-120"/>
+              </a:rPr>
+              <a:t>genai</a:t>
+            </a:r>
+            <a:r>
+              <a:rPr lang="en-US" altLang="ko-KR" sz="950" dirty="0">
+                <a:solidFill>
+                  <a:srgbClr val="111848"/>
+                </a:solidFill>
+                <a:latin typeface="Arial" pitchFamily="34" charset="0"/>
+                <a:ea typeface="Arial" pitchFamily="34" charset="-122"/>
+                <a:cs typeface="Arial" pitchFamily="34" charset="-120"/>
+              </a:rPr>
+              <a:t> python-</a:t>
+            </a:r>
+            <a:r>
+              <a:rPr lang="en-US" altLang="ko-KR" sz="950" dirty="0" err="1">
+                <a:solidFill>
+                  <a:srgbClr val="111848"/>
+                </a:solidFill>
+                <a:latin typeface="Arial" pitchFamily="34" charset="0"/>
+                <a:ea typeface="Arial" pitchFamily="34" charset="-122"/>
+                <a:cs typeface="Arial" pitchFamily="34" charset="-120"/>
+              </a:rPr>
+              <a:t>dotenv</a:t>
+            </a:r>
+            <a:endParaRPr lang="en-US" sz="950" dirty="0"/>
+          </a:p>
+        </p:txBody>
+      </p:sp>
+      <p:sp>
+        <p:nvSpPr>
+          <p:cNvPr id="14" name="Text 12"/>
+          <p:cNvSpPr/>
+          <p:nvPr/>
+        </p:nvSpPr>
+        <p:spPr>
+          <a:xfrm>
+            <a:off x="411480" y="2706624"/>
+            <a:ext cx="5212080" cy="246888"/>
+          </a:xfrm>
+          <a:prstGeom prst="rect">
+            <a:avLst/>
+          </a:prstGeom>
+          <a:noFill/>
+          <a:ln/>
+        </p:spPr>
+        <p:txBody>
+          <a:bodyPr wrap="square" rtlCol="0" anchor="ctr"/>
+          <a:lstStyle/>
+          <a:p>
+            <a:pPr marL="0" indent="0">
+              <a:buNone/>
+            </a:pPr>
+            <a:r>
+              <a:rPr lang="en-US" sz="950" dirty="0">
+                <a:solidFill>
+                  <a:srgbClr val="111848"/>
+                </a:solidFill>
+                <a:latin typeface="Arial" pitchFamily="34" charset="0"/>
+                <a:ea typeface="Arial" pitchFamily="34" charset="-122"/>
+                <a:cs typeface="Arial" pitchFamily="34" charset="-120"/>
+              </a:rPr>
+              <a:t>             </a:t>
             </a:r>
             <a:endParaRPr lang="en-US" sz="950" dirty="0"/>
           </a:p>
@@ -17047,7 +17121,7 @@
           <a:bodyPr/>
           <a:lstStyle/>
           <a:p>
-            <a:endParaRPr lang="ko-KR" altLang="en-US"/>
+            <a:endParaRPr lang="ko-KR" altLang="en-US" dirty="0"/>
           </a:p>
         </p:txBody>
       </p:sp>
@@ -17795,6 +17869,72 @@
               <a:t>2 / 19</a:t>
             </a:r>
             <a:endParaRPr lang="en-US" sz="900" dirty="0"/>
+          </a:p>
+        </p:txBody>
+      </p:sp>
+      <p:sp>
+        <p:nvSpPr>
+          <p:cNvPr id="16" name="Text 26">
+            <a:extLst>
+              <a:ext uri="{FF2B5EF4-FFF2-40B4-BE49-F238E27FC236}">
+                <a16:creationId xmlns:a16="http://schemas.microsoft.com/office/drawing/2014/main" id="{8C1A3C1F-3D0D-7928-5ECA-576640A19156}"/>
+              </a:ext>
+            </a:extLst>
+          </p:cNvPr>
+          <p:cNvSpPr/>
+          <p:nvPr/>
+        </p:nvSpPr>
+        <p:spPr>
+          <a:xfrm>
+            <a:off x="6186946" y="1629401"/>
+            <a:ext cx="5577840" cy="228600"/>
+          </a:xfrm>
+          <a:prstGeom prst="rect">
+            <a:avLst/>
+          </a:prstGeom>
+          <a:noFill/>
+          <a:ln/>
+        </p:spPr>
+        <p:txBody>
+          <a:bodyPr wrap="square" lIns="0" tIns="0" rIns="0" bIns="0" rtlCol="0" anchor="ctr"/>
+          <a:lstStyle/>
+          <a:p>
+            <a:pPr marL="0" indent="0">
+              <a:buNone/>
+            </a:pPr>
+            <a:r>
+              <a:rPr lang="en-US" sz="950" dirty="0">
+                <a:solidFill>
+                  <a:srgbClr val="F59E0B"/>
+                </a:solidFill>
+                <a:latin typeface="Consolas" pitchFamily="34" charset="0"/>
+                <a:ea typeface="Consolas" pitchFamily="34" charset="-122"/>
+                <a:cs typeface="Consolas" pitchFamily="34" charset="-120"/>
+              </a:rPr>
+              <a:t>GARAK_MODEL = </a:t>
+            </a:r>
+            <a:r>
+              <a:rPr lang="en-US" sz="950" dirty="0" err="1">
+                <a:solidFill>
+                  <a:srgbClr val="F59E0B"/>
+                </a:solidFill>
+                <a:latin typeface="Consolas" pitchFamily="34" charset="0"/>
+                <a:ea typeface="Consolas" pitchFamily="34" charset="-122"/>
+                <a:cs typeface="Consolas" pitchFamily="34" charset="-120"/>
+              </a:rPr>
+              <a:t>f"gemini</a:t>
+            </a:r>
+            <a:r>
+              <a:rPr lang="en-US" sz="950" dirty="0">
+                <a:solidFill>
+                  <a:srgbClr val="F59E0B"/>
+                </a:solidFill>
+                <a:latin typeface="Consolas" pitchFamily="34" charset="0"/>
+                <a:ea typeface="Consolas" pitchFamily="34" charset="-122"/>
+                <a:cs typeface="Consolas" pitchFamily="34" charset="-120"/>
+              </a:rPr>
+              <a:t>/{MODEL}" </a:t>
+            </a:r>
           </a:p>
         </p:txBody>
       </p:sp>
@@ -19208,9 +19348,6 @@
           <a:bodyPr wrap="square" lIns="0" tIns="0" rIns="0" bIns="0" rtlCol="0" anchor="ctr"/>
           <a:lstStyle/>
           <a:p>
-            <a:pPr marL="0" indent="0">
-              <a:buNone/>
-            </a:pPr>
             <a:r>
               <a:rPr lang="en-US" sz="950" dirty="0">
                 <a:solidFill>
@@ -19220,75 +19357,19 @@
                 <a:ea typeface="Consolas" pitchFamily="34" charset="-122"/>
                 <a:cs typeface="Consolas" pitchFamily="34" charset="-120"/>
               </a:rPr>
-              <a:t>    --target_name gemini/...-lite \</a:t>
-            </a:r>
-            <a:endParaRPr lang="en-US" sz="950" dirty="0"/>
-          </a:p>
-        </p:txBody>
-      </p:sp>
-      <p:sp>
-        <p:nvSpPr>
-          <p:cNvPr id="36" name="Text 34"/>
-          <p:cNvSpPr/>
-          <p:nvPr/>
-        </p:nvSpPr>
-        <p:spPr>
-          <a:xfrm>
-            <a:off x="6355080" y="4114800"/>
-            <a:ext cx="5303520" cy="228600"/>
-          </a:xfrm>
-          <a:prstGeom prst="rect">
-            <a:avLst/>
-          </a:prstGeom>
-          <a:noFill/>
-          <a:ln/>
-        </p:spPr>
-        <p:txBody>
-          <a:bodyPr wrap="square" lIns="0" tIns="0" rIns="0" bIns="0" rtlCol="0" anchor="ctr"/>
-          <a:lstStyle/>
-          <a:p>
-            <a:pPr marL="0" indent="0">
-              <a:buNone/>
-            </a:pPr>
-            <a:r>
-              <a:rPr lang="en-US" sz="950" dirty="0">
-                <a:solidFill>
-                  <a:srgbClr val="10B981"/>
+              <a:t>    --</a:t>
+            </a:r>
+            <a:r>
+              <a:rPr lang="en-US" sz="950" dirty="0" err="1">
+                <a:solidFill>
+                  <a:srgbClr val="E6EDF3"/>
                 </a:solidFill>
                 <a:latin typeface="Consolas" pitchFamily="34" charset="0"/>
                 <a:ea typeface="Consolas" pitchFamily="34" charset="-122"/>
                 <a:cs typeface="Consolas" pitchFamily="34" charset="-120"/>
               </a:rPr>
-              <a:t>    --probes dan.Dan_11_0 \</a:t>
-            </a:r>
-            <a:endParaRPr lang="en-US" sz="950" dirty="0"/>
-          </a:p>
-        </p:txBody>
-      </p:sp>
-      <p:sp>
-        <p:nvSpPr>
-          <p:cNvPr id="37" name="Text 35"/>
-          <p:cNvSpPr/>
-          <p:nvPr/>
-        </p:nvSpPr>
-        <p:spPr>
-          <a:xfrm>
-            <a:off x="6355080" y="4361688"/>
-            <a:ext cx="5303520" cy="228600"/>
-          </a:xfrm>
-          <a:prstGeom prst="rect">
-            <a:avLst/>
-          </a:prstGeom>
-          <a:noFill/>
-          <a:ln/>
-        </p:spPr>
-        <p:txBody>
-          <a:bodyPr wrap="square" lIns="0" tIns="0" rIns="0" bIns="0" rtlCol="0" anchor="ctr"/>
-          <a:lstStyle/>
-          <a:p>
-            <a:pPr marL="0" indent="0">
-              <a:buNone/>
-            </a:pPr>
+              <a:t>target_name</a:t>
+            </a:r>
             <a:r>
               <a:rPr lang="en-US" sz="950" dirty="0">
                 <a:solidFill>
@@ -19298,9 +19379,150 @@
                 <a:ea typeface="Consolas" pitchFamily="34" charset="-122"/>
                 <a:cs typeface="Consolas" pitchFamily="34" charset="-120"/>
               </a:rPr>
-              <a:t>    -g 1</a:t>
+              <a:t> </a:t>
+            </a:r>
+            <a:r>
+              <a:rPr lang="en-US" sz="950" dirty="0" err="1">
+                <a:solidFill>
+                  <a:srgbClr val="E6EDF3"/>
+                </a:solidFill>
+                <a:latin typeface="Consolas" pitchFamily="34" charset="0"/>
+                <a:ea typeface="Consolas" pitchFamily="34" charset="-122"/>
+                <a:cs typeface="Consolas" pitchFamily="34" charset="-120"/>
+              </a:rPr>
+              <a:t>gemini</a:t>
+            </a:r>
+            <a:r>
+              <a:rPr lang="en-US" sz="950" dirty="0">
+                <a:solidFill>
+                  <a:srgbClr val="E6EDF3"/>
+                </a:solidFill>
+                <a:latin typeface="Consolas" pitchFamily="34" charset="0"/>
+                <a:ea typeface="Consolas" pitchFamily="34" charset="-122"/>
+                <a:cs typeface="Consolas" pitchFamily="34" charset="-120"/>
+              </a:rPr>
+              <a:t>/gemini-2.5-flash-lite \</a:t>
             </a:r>
             <a:endParaRPr lang="en-US" sz="950" dirty="0"/>
+          </a:p>
+        </p:txBody>
+      </p:sp>
+      <p:sp>
+        <p:nvSpPr>
+          <p:cNvPr id="36" name="Text 34"/>
+          <p:cNvSpPr/>
+          <p:nvPr/>
+        </p:nvSpPr>
+        <p:spPr>
+          <a:xfrm>
+            <a:off x="6355080" y="4114800"/>
+            <a:ext cx="5303520" cy="228600"/>
+          </a:xfrm>
+          <a:prstGeom prst="rect">
+            <a:avLst/>
+          </a:prstGeom>
+          <a:noFill/>
+          <a:ln/>
+        </p:spPr>
+        <p:txBody>
+          <a:bodyPr wrap="square" lIns="0" tIns="0" rIns="0" bIns="0" rtlCol="0" anchor="ctr"/>
+          <a:lstStyle/>
+          <a:p>
+            <a:pPr marL="0" indent="0">
+              <a:buNone/>
+            </a:pPr>
+            <a:r>
+              <a:rPr lang="en-US" sz="950" dirty="0">
+                <a:solidFill>
+                  <a:srgbClr val="10B981"/>
+                </a:solidFill>
+                <a:latin typeface="Consolas" pitchFamily="34" charset="0"/>
+                <a:ea typeface="Consolas" pitchFamily="34" charset="-122"/>
+                <a:cs typeface="Consolas" pitchFamily="34" charset="-120"/>
+              </a:rPr>
+              <a:t>    --probes dan.Dan_11_0 \</a:t>
+            </a:r>
+            <a:endParaRPr lang="en-US" sz="950" dirty="0"/>
+          </a:p>
+        </p:txBody>
+      </p:sp>
+      <p:sp>
+        <p:nvSpPr>
+          <p:cNvPr id="37" name="Text 35"/>
+          <p:cNvSpPr/>
+          <p:nvPr/>
+        </p:nvSpPr>
+        <p:spPr>
+          <a:xfrm>
+            <a:off x="6355080" y="4361688"/>
+            <a:ext cx="5303520" cy="228600"/>
+          </a:xfrm>
+          <a:prstGeom prst="rect">
+            <a:avLst/>
+          </a:prstGeom>
+          <a:noFill/>
+          <a:ln/>
+        </p:spPr>
+        <p:txBody>
+          <a:bodyPr wrap="square" lIns="0" tIns="0" rIns="0" bIns="0" rtlCol="0" anchor="ctr"/>
+          <a:lstStyle/>
+          <a:p>
+            <a:r>
+              <a:rPr lang="en-US" sz="950" dirty="0">
+                <a:solidFill>
+                  <a:schemeClr val="bg1"/>
+                </a:solidFill>
+                <a:latin typeface="Consolas" pitchFamily="34" charset="0"/>
+                <a:ea typeface="Consolas" pitchFamily="34" charset="-122"/>
+                <a:cs typeface="Consolas" pitchFamily="34" charset="-120"/>
+              </a:rPr>
+              <a:t>    -g 1 </a:t>
+            </a:r>
+            <a:r>
+              <a:rPr lang="ko-KR" altLang="en-US" dirty="0">
+                <a:solidFill>
+                  <a:schemeClr val="bg1"/>
+                </a:solidFill>
+              </a:rPr>
+              <a:t> </a:t>
+            </a:r>
+            <a:r>
+              <a:rPr lang="en-US" altLang="ko-KR" sz="800" dirty="0">
+                <a:solidFill>
+                  <a:schemeClr val="bg2"/>
+                </a:solidFill>
+              </a:rPr>
+              <a:t># </a:t>
+            </a:r>
+            <a:r>
+              <a:rPr lang="ko-KR" altLang="en-US" sz="800" dirty="0">
+                <a:solidFill>
+                  <a:schemeClr val="bg2"/>
+                </a:solidFill>
+              </a:rPr>
+              <a:t>프롬프트당 응답 </a:t>
+            </a:r>
+            <a:r>
+              <a:rPr lang="en-US" altLang="ko-KR" sz="800" dirty="0">
+                <a:solidFill>
+                  <a:schemeClr val="bg2"/>
+                </a:solidFill>
+              </a:rPr>
+              <a:t>1</a:t>
+            </a:r>
+            <a:r>
+              <a:rPr lang="ko-KR" altLang="en-US" sz="800" dirty="0">
+                <a:solidFill>
+                  <a:schemeClr val="bg2"/>
+                </a:solidFill>
+              </a:rPr>
+              <a:t>회</a:t>
+            </a:r>
+            <a:endParaRPr lang="ko-KR" altLang="en-US" dirty="0">
+              <a:solidFill>
+                <a:schemeClr val="bg2"/>
+              </a:solidFill>
+            </a:endParaRPr>
           </a:p>
         </p:txBody>
       </p:sp>
@@ -22691,27 +22913,61 @@
       </p:sp>
       <p:sp>
         <p:nvSpPr>
-          <p:cNvPr id="16" name="Shape 14"/>
-          <p:cNvSpPr/>
-          <p:nvPr/>
-        </p:nvSpPr>
-        <p:spPr>
-          <a:xfrm>
-            <a:off x="274320" y="3703320"/>
-            <a:ext cx="5303520" cy="2112264"/>
+          <p:cNvPr id="25" name="Text 23"/>
+          <p:cNvSpPr/>
+          <p:nvPr/>
+        </p:nvSpPr>
+        <p:spPr>
+          <a:xfrm>
+            <a:off x="5760720" y="640080"/>
+            <a:ext cx="6126480" cy="320040"/>
+          </a:xfrm>
+          <a:prstGeom prst="rect">
+            <a:avLst/>
+          </a:prstGeom>
+          <a:noFill/>
+          <a:ln/>
+        </p:spPr>
+        <p:txBody>
+          <a:bodyPr wrap="square" rtlCol="0" anchor="ctr"/>
+          <a:lstStyle/>
+          <a:p>
+            <a:pPr marL="0" indent="0">
+              <a:buNone/>
+            </a:pPr>
+            <a:r>
+              <a:rPr lang="en-US" sz="1200" b="1" dirty="0">
+                <a:solidFill>
+                  <a:srgbClr val="111848"/>
+                </a:solidFill>
+                <a:latin typeface="Arial" pitchFamily="34" charset="0"/>
+                <a:ea typeface="Arial" pitchFamily="34" charset="-122"/>
+                <a:cs typeface="Arial" pitchFamily="34" charset="-120"/>
+              </a:rPr>
+              <a:t>Cell 9: 실행 코드</a:t>
+            </a:r>
+            <a:endParaRPr lang="en-US" sz="1200" dirty="0"/>
+          </a:p>
+        </p:txBody>
+      </p:sp>
+      <p:sp>
+        <p:nvSpPr>
+          <p:cNvPr id="26" name="Shape 24"/>
+          <p:cNvSpPr/>
+          <p:nvPr/>
+        </p:nvSpPr>
+        <p:spPr>
+          <a:xfrm>
+            <a:off x="5760720" y="1005839"/>
+            <a:ext cx="6126480" cy="4583601"/>
           </a:xfrm>
           <a:prstGeom prst="rect">
             <a:avLst/>
           </a:prstGeom>
           <a:solidFill>
-            <a:srgbClr val="FFFFFF"/>
+            <a:srgbClr val="0D1117"/>
           </a:solidFill>
-          <a:ln w="15240">
-            <a:solidFill>
-              <a:srgbClr val="2563EB"/>
-            </a:solidFill>
-            <a:prstDash val="solid"/>
-          </a:ln>
+          <a:ln/>
           <a:effectLst>
             <a:outerShdw blurRad="63500" dist="25400" dir="8100000" algn="bl" rotWithShape="0">
               <a:srgbClr val="000000">
@@ -22730,384 +22986,6 @@
       </p:sp>
       <p:sp>
         <p:nvSpPr>
-          <p:cNvPr id="17" name="Shape 15"/>
-          <p:cNvSpPr/>
-          <p:nvPr/>
-        </p:nvSpPr>
-        <p:spPr>
-          <a:xfrm>
-            <a:off x="274320" y="3703320"/>
-            <a:ext cx="5303520" cy="329184"/>
-          </a:xfrm>
-          <a:prstGeom prst="rect">
-            <a:avLst/>
-          </a:prstGeom>
-          <a:solidFill>
-            <a:srgbClr val="2563EB"/>
-          </a:solidFill>
-          <a:ln w="12700">
-            <a:solidFill>
-              <a:srgbClr val="2563EB"/>
-            </a:solidFill>
-            <a:prstDash val="solid"/>
-          </a:ln>
-        </p:spPr>
-        <p:txBody>
-          <a:bodyPr/>
-          <a:lstStyle/>
-          <a:p>
-            <a:endParaRPr lang="ko-KR" altLang="en-US"/>
-          </a:p>
-        </p:txBody>
-      </p:sp>
-      <p:sp>
-        <p:nvSpPr>
-          <p:cNvPr id="18" name="Text 16"/>
-          <p:cNvSpPr/>
-          <p:nvPr/>
-        </p:nvSpPr>
-        <p:spPr>
-          <a:xfrm>
-            <a:off x="384048" y="3703320"/>
-            <a:ext cx="5084064" cy="329184"/>
-          </a:xfrm>
-          <a:prstGeom prst="rect">
-            <a:avLst/>
-          </a:prstGeom>
-          <a:noFill/>
-          <a:ln/>
-        </p:spPr>
-        <p:txBody>
-          <a:bodyPr wrap="square" lIns="0" tIns="0" rIns="0" bIns="0" rtlCol="0" anchor="ctr"/>
-          <a:lstStyle/>
-          <a:p>
-            <a:pPr marL="0" indent="0">
-              <a:buNone/>
-            </a:pPr>
-            <a:r>
-              <a:rPr lang="en-US" sz="1100" b="1" dirty="0">
-                <a:solidFill>
-                  <a:srgbClr val="FFFFFF"/>
-                </a:solidFill>
-                <a:latin typeface="Arial" pitchFamily="34" charset="0"/>
-                <a:ea typeface="Arial" pitchFamily="34" charset="-122"/>
-                <a:cs typeface="Arial" pitchFamily="34" charset="-120"/>
-              </a:rPr>
-              <a:t>Garak 6종 프로브 설명</a:t>
-            </a:r>
-            <a:endParaRPr lang="en-US" sz="1100" dirty="0"/>
-          </a:p>
-        </p:txBody>
-      </p:sp>
-      <p:sp>
-        <p:nvSpPr>
-          <p:cNvPr id="19" name="Text 17"/>
-          <p:cNvSpPr/>
-          <p:nvPr/>
-        </p:nvSpPr>
-        <p:spPr>
-          <a:xfrm>
-            <a:off x="411480" y="4105656"/>
-            <a:ext cx="5029200" cy="246888"/>
-          </a:xfrm>
-          <a:prstGeom prst="rect">
-            <a:avLst/>
-          </a:prstGeom>
-          <a:noFill/>
-          <a:ln/>
-        </p:spPr>
-        <p:txBody>
-          <a:bodyPr wrap="square" rtlCol="0" anchor="ctr"/>
-          <a:lstStyle/>
-          <a:p>
-            <a:pPr marL="0" indent="0">
-              <a:buNone/>
-            </a:pPr>
-            <a:r>
-              <a:rPr lang="en-US" sz="950" dirty="0">
-                <a:solidFill>
-                  <a:srgbClr val="111848"/>
-                </a:solidFill>
-                <a:latin typeface="Arial" pitchFamily="34" charset="0"/>
-                <a:ea typeface="Arial" pitchFamily="34" charset="-122"/>
-                <a:cs typeface="Arial" pitchFamily="34" charset="-120"/>
-              </a:rPr>
-              <a:t>dan.Dan_11_0       — DAN 11.0 탈옥 프롬프트</a:t>
-            </a:r>
-            <a:endParaRPr lang="en-US" sz="950" dirty="0"/>
-          </a:p>
-        </p:txBody>
-      </p:sp>
-      <p:sp>
-        <p:nvSpPr>
-          <p:cNvPr id="20" name="Text 18"/>
-          <p:cNvSpPr/>
-          <p:nvPr/>
-        </p:nvSpPr>
-        <p:spPr>
-          <a:xfrm>
-            <a:off x="411480" y="4379976"/>
-            <a:ext cx="5029200" cy="246888"/>
-          </a:xfrm>
-          <a:prstGeom prst="rect">
-            <a:avLst/>
-          </a:prstGeom>
-          <a:noFill/>
-          <a:ln/>
-        </p:spPr>
-        <p:txBody>
-          <a:bodyPr wrap="square" rtlCol="0" anchor="ctr"/>
-          <a:lstStyle/>
-          <a:p>
-            <a:pPr marL="0" indent="0">
-              <a:buNone/>
-            </a:pPr>
-            <a:r>
-              <a:rPr lang="en-US" sz="950" dirty="0">
-                <a:solidFill>
-                  <a:srgbClr val="111848"/>
-                </a:solidFill>
-                <a:latin typeface="Arial" pitchFamily="34" charset="0"/>
-                <a:ea typeface="Arial" pitchFamily="34" charset="-122"/>
-                <a:cs typeface="Arial" pitchFamily="34" charset="-120"/>
-              </a:rPr>
-              <a:t>promptinject.Hijack — 직접 프롬프트 인젝션</a:t>
-            </a:r>
-            <a:endParaRPr lang="en-US" sz="950" dirty="0"/>
-          </a:p>
-        </p:txBody>
-      </p:sp>
-      <p:sp>
-        <p:nvSpPr>
-          <p:cNvPr id="21" name="Text 19"/>
-          <p:cNvSpPr/>
-          <p:nvPr/>
-        </p:nvSpPr>
-        <p:spPr>
-          <a:xfrm>
-            <a:off x="411480" y="4654296"/>
-            <a:ext cx="5029200" cy="246888"/>
-          </a:xfrm>
-          <a:prstGeom prst="rect">
-            <a:avLst/>
-          </a:prstGeom>
-          <a:noFill/>
-          <a:ln/>
-        </p:spPr>
-        <p:txBody>
-          <a:bodyPr wrap="square" rtlCol="0" anchor="ctr"/>
-          <a:lstStyle/>
-          <a:p>
-            <a:pPr marL="0" indent="0">
-              <a:buNone/>
-            </a:pPr>
-            <a:r>
-              <a:rPr lang="en-US" sz="950" dirty="0">
-                <a:solidFill>
-                  <a:srgbClr val="111848"/>
-                </a:solidFill>
-                <a:latin typeface="Arial" pitchFamily="34" charset="0"/>
-                <a:ea typeface="Arial" pitchFamily="34" charset="-122"/>
-                <a:cs typeface="Arial" pitchFamily="34" charset="-120"/>
-              </a:rPr>
-              <a:t>latentinjection.* — 간접 인젝션 (RAG 시나리오)</a:t>
-            </a:r>
-            <a:endParaRPr lang="en-US" sz="950" dirty="0"/>
-          </a:p>
-        </p:txBody>
-      </p:sp>
-      <p:sp>
-        <p:nvSpPr>
-          <p:cNvPr id="22" name="Text 20"/>
-          <p:cNvSpPr/>
-          <p:nvPr/>
-        </p:nvSpPr>
-        <p:spPr>
-          <a:xfrm>
-            <a:off x="411480" y="4928616"/>
-            <a:ext cx="5029200" cy="246888"/>
-          </a:xfrm>
-          <a:prstGeom prst="rect">
-            <a:avLst/>
-          </a:prstGeom>
-          <a:noFill/>
-          <a:ln/>
-        </p:spPr>
-        <p:txBody>
-          <a:bodyPr wrap="square" rtlCol="0" anchor="ctr"/>
-          <a:lstStyle/>
-          <a:p>
-            <a:pPr marL="0" indent="0">
-              <a:buNone/>
-            </a:pPr>
-            <a:r>
-              <a:rPr lang="en-US" sz="950" dirty="0">
-                <a:solidFill>
-                  <a:srgbClr val="111848"/>
-                </a:solidFill>
-                <a:latin typeface="Arial" pitchFamily="34" charset="0"/>
-                <a:ea typeface="Arial" pitchFamily="34" charset="-122"/>
-                <a:cs typeface="Arial" pitchFamily="34" charset="-120"/>
-              </a:rPr>
-              <a:t>encoding.InjectBase64 — 인코딩 우회</a:t>
-            </a:r>
-            <a:endParaRPr lang="en-US" sz="950" dirty="0"/>
-          </a:p>
-        </p:txBody>
-      </p:sp>
-      <p:sp>
-        <p:nvSpPr>
-          <p:cNvPr id="23" name="Text 21"/>
-          <p:cNvSpPr/>
-          <p:nvPr/>
-        </p:nvSpPr>
-        <p:spPr>
-          <a:xfrm>
-            <a:off x="411480" y="5202936"/>
-            <a:ext cx="5029200" cy="246888"/>
-          </a:xfrm>
-          <a:prstGeom prst="rect">
-            <a:avLst/>
-          </a:prstGeom>
-          <a:noFill/>
-          <a:ln/>
-        </p:spPr>
-        <p:txBody>
-          <a:bodyPr wrap="square" rtlCol="0" anchor="ctr"/>
-          <a:lstStyle/>
-          <a:p>
-            <a:pPr marL="0" indent="0">
-              <a:buNone/>
-            </a:pPr>
-            <a:r>
-              <a:rPr lang="en-US" sz="950" dirty="0">
-                <a:solidFill>
-                  <a:srgbClr val="111848"/>
-                </a:solidFill>
-                <a:latin typeface="Arial" pitchFamily="34" charset="0"/>
-                <a:ea typeface="Arial" pitchFamily="34" charset="-122"/>
-                <a:cs typeface="Arial" pitchFamily="34" charset="-120"/>
-              </a:rPr>
-              <a:t>web_injection.*   — 마크다운 이미지 exfil</a:t>
-            </a:r>
-            <a:endParaRPr lang="en-US" sz="950" dirty="0"/>
-          </a:p>
-        </p:txBody>
-      </p:sp>
-      <p:sp>
-        <p:nvSpPr>
-          <p:cNvPr id="24" name="Text 22"/>
-          <p:cNvSpPr/>
-          <p:nvPr/>
-        </p:nvSpPr>
-        <p:spPr>
-          <a:xfrm>
-            <a:off x="411480" y="5477256"/>
-            <a:ext cx="5029200" cy="246888"/>
-          </a:xfrm>
-          <a:prstGeom prst="rect">
-            <a:avLst/>
-          </a:prstGeom>
-          <a:noFill/>
-          <a:ln/>
-        </p:spPr>
-        <p:txBody>
-          <a:bodyPr wrap="square" rtlCol="0" anchor="ctr"/>
-          <a:lstStyle/>
-          <a:p>
-            <a:pPr marL="0" indent="0">
-              <a:buNone/>
-            </a:pPr>
-            <a:r>
-              <a:rPr lang="en-US" sz="950" dirty="0">
-                <a:solidFill>
-                  <a:srgbClr val="111848"/>
-                </a:solidFill>
-                <a:latin typeface="Arial" pitchFamily="34" charset="0"/>
-                <a:ea typeface="Arial" pitchFamily="34" charset="-122"/>
-                <a:cs typeface="Arial" pitchFamily="34" charset="-120"/>
-              </a:rPr>
-              <a:t>realtoxicity.*    — 독성 콘텐츠 탐지</a:t>
-            </a:r>
-            <a:endParaRPr lang="en-US" sz="950" dirty="0"/>
-          </a:p>
-        </p:txBody>
-      </p:sp>
-      <p:sp>
-        <p:nvSpPr>
-          <p:cNvPr id="25" name="Text 23"/>
-          <p:cNvSpPr/>
-          <p:nvPr/>
-        </p:nvSpPr>
-        <p:spPr>
-          <a:xfrm>
-            <a:off x="5760720" y="640080"/>
-            <a:ext cx="6126480" cy="320040"/>
-          </a:xfrm>
-          <a:prstGeom prst="rect">
-            <a:avLst/>
-          </a:prstGeom>
-          <a:noFill/>
-          <a:ln/>
-        </p:spPr>
-        <p:txBody>
-          <a:bodyPr wrap="square" rtlCol="0" anchor="ctr"/>
-          <a:lstStyle/>
-          <a:p>
-            <a:pPr marL="0" indent="0">
-              <a:buNone/>
-            </a:pPr>
-            <a:r>
-              <a:rPr lang="en-US" sz="1200" b="1" dirty="0">
-                <a:solidFill>
-                  <a:srgbClr val="111848"/>
-                </a:solidFill>
-                <a:latin typeface="Arial" pitchFamily="34" charset="0"/>
-                <a:ea typeface="Arial" pitchFamily="34" charset="-122"/>
-                <a:cs typeface="Arial" pitchFamily="34" charset="-120"/>
-              </a:rPr>
-              <a:t>Cell 9: 실행 코드</a:t>
-            </a:r>
-            <a:endParaRPr lang="en-US" sz="1200" dirty="0"/>
-          </a:p>
-        </p:txBody>
-      </p:sp>
-      <p:sp>
-        <p:nvSpPr>
-          <p:cNvPr id="26" name="Shape 24"/>
-          <p:cNvSpPr/>
-          <p:nvPr/>
-        </p:nvSpPr>
-        <p:spPr>
-          <a:xfrm>
-            <a:off x="5760720" y="1005840"/>
-            <a:ext cx="6126480" cy="4809744"/>
-          </a:xfrm>
-          <a:prstGeom prst="rect">
-            <a:avLst/>
-          </a:prstGeom>
-          <a:solidFill>
-            <a:srgbClr val="0D1117"/>
-          </a:solidFill>
-          <a:ln/>
-          <a:effectLst>
-            <a:outerShdw blurRad="63500" dist="25400" dir="8100000" algn="bl" rotWithShape="0">
-              <a:srgbClr val="000000">
-                <a:alpha val="10000"/>
-              </a:srgbClr>
-            </a:outerShdw>
-          </a:effectLst>
-        </p:spPr>
-        <p:txBody>
-          <a:bodyPr/>
-          <a:lstStyle/>
-          <a:p>
-            <a:endParaRPr lang="ko-KR" altLang="en-US"/>
-          </a:p>
-        </p:txBody>
-      </p:sp>
-      <p:sp>
-        <p:nvSpPr>
           <p:cNvPr id="27" name="Text 25"/>
           <p:cNvSpPr/>
           <p:nvPr/>
@@ -23272,9 +23150,6 @@
           <a:bodyPr wrap="square" lIns="0" tIns="0" rIns="0" bIns="0" rtlCol="0" anchor="ctr"/>
           <a:lstStyle/>
           <a:p>
-            <a:pPr marL="0" indent="0">
-              <a:buNone/>
-            </a:pPr>
             <a:r>
               <a:rPr lang="en-US" sz="950" dirty="0">
                 <a:solidFill>
@@ -23284,38 +23159,10 @@
                 <a:ea typeface="Consolas" pitchFamily="34" charset="-122"/>
                 <a:cs typeface="Consolas" pitchFamily="34" charset="-120"/>
               </a:rPr>
-              <a:t>    [sys.executable, '-m', 'garak',</a:t>
-            </a:r>
-            <a:endParaRPr lang="en-US" sz="950" dirty="0"/>
-          </a:p>
-        </p:txBody>
-      </p:sp>
-      <p:sp>
-        <p:nvSpPr>
-          <p:cNvPr id="32" name="Text 30"/>
-          <p:cNvSpPr/>
-          <p:nvPr/>
-        </p:nvSpPr>
-        <p:spPr>
-          <a:xfrm>
-            <a:off x="5897880" y="2350008"/>
-            <a:ext cx="5852160" cy="228600"/>
-          </a:xfrm>
-          <a:prstGeom prst="rect">
-            <a:avLst/>
-          </a:prstGeom>
-          <a:noFill/>
-          <a:ln/>
-        </p:spPr>
-        <p:txBody>
-          <a:bodyPr wrap="square" lIns="0" tIns="0" rIns="0" bIns="0" rtlCol="0" anchor="ctr"/>
-          <a:lstStyle/>
-          <a:p>
-            <a:pPr marL="0" indent="0">
-              <a:buNone/>
-            </a:pPr>
-            <a:r>
-              <a:rPr lang="en-US" sz="950" dirty="0">
+              <a:t>    [sys.executable, '-m', '</a:t>
+            </a:r>
+            <a:r>
+              <a:rPr lang="en-US" sz="950" dirty="0" err="1">
                 <a:solidFill>
                   <a:srgbClr val="E6EDF3"/>
                 </a:solidFill>
@@ -23323,36 +23170,8 @@
                 <a:ea typeface="Consolas" pitchFamily="34" charset="-122"/>
                 <a:cs typeface="Consolas" pitchFamily="34" charset="-120"/>
               </a:rPr>
-              <a:t>     '--version'],</a:t>
-            </a:r>
-            <a:endParaRPr lang="en-US" sz="950" dirty="0"/>
-          </a:p>
-        </p:txBody>
-      </p:sp>
-      <p:sp>
-        <p:nvSpPr>
-          <p:cNvPr id="33" name="Text 31"/>
-          <p:cNvSpPr/>
-          <p:nvPr/>
-        </p:nvSpPr>
-        <p:spPr>
-          <a:xfrm>
-            <a:off x="5897880" y="2596896"/>
-            <a:ext cx="5852160" cy="228600"/>
-          </a:xfrm>
-          <a:prstGeom prst="rect">
-            <a:avLst/>
-          </a:prstGeom>
-          <a:noFill/>
-          <a:ln/>
-        </p:spPr>
-        <p:txBody>
-          <a:bodyPr wrap="square" lIns="0" tIns="0" rIns="0" bIns="0" rtlCol="0" anchor="ctr"/>
-          <a:lstStyle/>
-          <a:p>
-            <a:pPr marL="0" indent="0">
-              <a:buNone/>
-            </a:pPr>
+              <a:t>garak</a:t>
+            </a:r>
             <a:r>
               <a:rPr lang="en-US" sz="950" dirty="0">
                 <a:solidFill>
@@ -23362,38 +23181,10 @@
                 <a:ea typeface="Consolas" pitchFamily="34" charset="-122"/>
                 <a:cs typeface="Consolas" pitchFamily="34" charset="-120"/>
               </a:rPr>
-              <a:t>    capture_output=True, text=True</a:t>
-            </a:r>
-            <a:endParaRPr lang="en-US" sz="950" dirty="0"/>
-          </a:p>
-        </p:txBody>
-      </p:sp>
-      <p:sp>
-        <p:nvSpPr>
-          <p:cNvPr id="34" name="Text 32"/>
-          <p:cNvSpPr/>
-          <p:nvPr/>
-        </p:nvSpPr>
-        <p:spPr>
-          <a:xfrm>
-            <a:off x="5897880" y="2843784"/>
-            <a:ext cx="5852160" cy="228600"/>
-          </a:xfrm>
-          <a:prstGeom prst="rect">
-            <a:avLst/>
-          </a:prstGeom>
-          <a:noFill/>
-          <a:ln/>
-        </p:spPr>
-        <p:txBody>
-          <a:bodyPr wrap="square" lIns="0" tIns="0" rIns="0" bIns="0" rtlCol="0" anchor="ctr"/>
-          <a:lstStyle/>
-          <a:p>
-            <a:pPr marL="0" indent="0">
-              <a:buNone/>
-            </a:pPr>
-            <a:r>
-              <a:rPr lang="en-US" sz="950" dirty="0">
+              <a:t>’, </a:t>
+            </a:r>
+            <a:r>
+              <a:rPr lang="en-US" altLang="ko-KR" sz="950" dirty="0">
                 <a:solidFill>
                   <a:srgbClr val="E6EDF3"/>
                 </a:solidFill>
@@ -23401,7 +23192,7 @@
                 <a:ea typeface="Consolas" pitchFamily="34" charset="-122"/>
                 <a:cs typeface="Consolas" pitchFamily="34" charset="-120"/>
               </a:rPr>
-              <a:t>)</a:t>
+              <a:t>'--version'],</a:t>
             </a:r>
             <a:endParaRPr lang="en-US" sz="950" dirty="0"/>
           </a:p>
@@ -23409,13 +23200,13 @@
       </p:sp>
       <p:sp>
         <p:nvSpPr>
-          <p:cNvPr id="35" name="Text 33"/>
-          <p:cNvSpPr/>
-          <p:nvPr/>
-        </p:nvSpPr>
-        <p:spPr>
-          <a:xfrm>
-            <a:off x="5897880" y="3090672"/>
+          <p:cNvPr id="33" name="Text 31"/>
+          <p:cNvSpPr/>
+          <p:nvPr/>
+        </p:nvSpPr>
+        <p:spPr>
+          <a:xfrm>
+            <a:off x="5897880" y="2370753"/>
             <a:ext cx="5852160" cy="228600"/>
           </a:xfrm>
           <a:prstGeom prst="rect">
@@ -23434,13 +23225,13 @@
             <a:r>
               <a:rPr lang="en-US" sz="950" dirty="0">
                 <a:solidFill>
-                  <a:srgbClr val="10B981"/>
+                  <a:srgbClr val="E6EDF3"/>
                 </a:solidFill>
                 <a:latin typeface="Consolas" pitchFamily="34" charset="0"/>
                 <a:ea typeface="Consolas" pitchFamily="34" charset="-122"/>
                 <a:cs typeface="Consolas" pitchFamily="34" charset="-120"/>
               </a:rPr>
-              <a:t>print(result.stdout or result.stderr)</a:t>
+              <a:t>    capture_output=True, text=True</a:t>
             </a:r>
             <a:endParaRPr lang="en-US" sz="950" dirty="0"/>
           </a:p>
@@ -23448,13 +23239,13 @@
       </p:sp>
       <p:sp>
         <p:nvSpPr>
-          <p:cNvPr id="36" name="Text 34"/>
-          <p:cNvSpPr/>
-          <p:nvPr/>
-        </p:nvSpPr>
-        <p:spPr>
-          <a:xfrm>
-            <a:off x="5897880" y="3337560"/>
+          <p:cNvPr id="34" name="Text 32"/>
+          <p:cNvSpPr/>
+          <p:nvPr/>
+        </p:nvSpPr>
+        <p:spPr>
+          <a:xfrm>
+            <a:off x="5897880" y="2617641"/>
             <a:ext cx="5852160" cy="228600"/>
           </a:xfrm>
           <a:prstGeom prst="rect">
@@ -23470,44 +23261,16 @@
             <a:pPr marL="0" indent="0">
               <a:buNone/>
             </a:pPr>
-            <a:endParaRPr lang="en-US" sz="950" dirty="0"/>
-          </a:p>
-        </p:txBody>
-      </p:sp>
-      <p:sp>
-        <p:nvSpPr>
-          <p:cNvPr id="37" name="Text 35"/>
-          <p:cNvSpPr/>
-          <p:nvPr/>
-        </p:nvSpPr>
-        <p:spPr>
-          <a:xfrm>
-            <a:off x="5897880" y="3584448"/>
-            <a:ext cx="5852160" cy="228600"/>
-          </a:xfrm>
-          <a:prstGeom prst="rect">
-            <a:avLst/>
-          </a:prstGeom>
-          <a:noFill/>
-          <a:ln/>
-        </p:spPr>
-        <p:txBody>
-          <a:bodyPr wrap="square" lIns="0" tIns="0" rIns="0" bIns="0" rtlCol="0" anchor="ctr"/>
-          <a:lstStyle/>
-          <a:p>
-            <a:pPr marL="0" indent="0">
-              <a:buNone/>
-            </a:pPr>
             <a:r>
               <a:rPr lang="en-US" sz="950" dirty="0">
                 <a:solidFill>
-                  <a:srgbClr val="8B949E"/>
+                  <a:srgbClr val="E6EDF3"/>
                 </a:solidFill>
                 <a:latin typeface="Consolas" pitchFamily="34" charset="0"/>
                 <a:ea typeface="Consolas" pitchFamily="34" charset="-122"/>
                 <a:cs typeface="Consolas" pitchFamily="34" charset="-120"/>
               </a:rPr>
-              <a:t># 기대 출력:</a:t>
+              <a:t>)</a:t>
             </a:r>
             <a:endParaRPr lang="en-US" sz="950" dirty="0"/>
           </a:p>
@@ -23515,13 +23278,13 @@
       </p:sp>
       <p:sp>
         <p:nvSpPr>
-          <p:cNvPr id="38" name="Text 36"/>
-          <p:cNvSpPr/>
-          <p:nvPr/>
-        </p:nvSpPr>
-        <p:spPr>
-          <a:xfrm>
-            <a:off x="5897880" y="3831336"/>
+          <p:cNvPr id="35" name="Text 33"/>
+          <p:cNvSpPr/>
+          <p:nvPr/>
+        </p:nvSpPr>
+        <p:spPr>
+          <a:xfrm>
+            <a:off x="5897880" y="2864529"/>
             <a:ext cx="5852160" cy="228600"/>
           </a:xfrm>
           <a:prstGeom prst="rect">
@@ -23540,13 +23303,13 @@
             <a:r>
               <a:rPr lang="en-US" sz="950" dirty="0">
                 <a:solidFill>
-                  <a:srgbClr val="8B949E"/>
+                  <a:srgbClr val="10B981"/>
                 </a:solidFill>
                 <a:latin typeface="Consolas" pitchFamily="34" charset="0"/>
                 <a:ea typeface="Consolas" pitchFamily="34" charset="-122"/>
                 <a:cs typeface="Consolas" pitchFamily="34" charset="-120"/>
               </a:rPr>
-              <a:t># garak v0.14.x</a:t>
+              <a:t>print(result.stdout or result.stderr)</a:t>
             </a:r>
             <a:endParaRPr lang="en-US" sz="950" dirty="0"/>
           </a:p>
@@ -23554,13 +23317,13 @@
       </p:sp>
       <p:sp>
         <p:nvSpPr>
-          <p:cNvPr id="39" name="Text 37"/>
-          <p:cNvSpPr/>
-          <p:nvPr/>
-        </p:nvSpPr>
-        <p:spPr>
-          <a:xfrm>
-            <a:off x="5897880" y="4078224"/>
+          <p:cNvPr id="36" name="Text 34"/>
+          <p:cNvSpPr/>
+          <p:nvPr/>
+        </p:nvSpPr>
+        <p:spPr>
+          <a:xfrm>
+            <a:off x="5897880" y="3337560"/>
             <a:ext cx="5852160" cy="228600"/>
           </a:xfrm>
           <a:prstGeom prst="rect">
@@ -23582,13 +23345,13 @@
       </p:sp>
       <p:sp>
         <p:nvSpPr>
-          <p:cNvPr id="40" name="Text 38"/>
-          <p:cNvSpPr/>
-          <p:nvPr/>
-        </p:nvSpPr>
-        <p:spPr>
-          <a:xfrm>
-            <a:off x="5897880" y="4325112"/>
+          <p:cNvPr id="37" name="Text 35"/>
+          <p:cNvSpPr/>
+          <p:nvPr/>
+        </p:nvSpPr>
+        <p:spPr>
+          <a:xfrm>
+            <a:off x="5897880" y="3358305"/>
             <a:ext cx="5852160" cy="228600"/>
           </a:xfrm>
           <a:prstGeom prst="rect">
@@ -23613,6 +23376,112 @@
                 <a:ea typeface="Consolas" pitchFamily="34" charset="-122"/>
                 <a:cs typeface="Consolas" pitchFamily="34" charset="-120"/>
               </a:rPr>
+              <a:t># 기대 출력:</a:t>
+            </a:r>
+            <a:endParaRPr lang="en-US" sz="950" dirty="0"/>
+          </a:p>
+        </p:txBody>
+      </p:sp>
+      <p:sp>
+        <p:nvSpPr>
+          <p:cNvPr id="38" name="Text 36"/>
+          <p:cNvSpPr/>
+          <p:nvPr/>
+        </p:nvSpPr>
+        <p:spPr>
+          <a:xfrm>
+            <a:off x="5897880" y="3605193"/>
+            <a:ext cx="5852160" cy="228600"/>
+          </a:xfrm>
+          <a:prstGeom prst="rect">
+            <a:avLst/>
+          </a:prstGeom>
+          <a:noFill/>
+          <a:ln/>
+        </p:spPr>
+        <p:txBody>
+          <a:bodyPr wrap="square" lIns="0" tIns="0" rIns="0" bIns="0" rtlCol="0" anchor="ctr"/>
+          <a:lstStyle/>
+          <a:p>
+            <a:pPr marL="0" indent="0">
+              <a:buNone/>
+            </a:pPr>
+            <a:r>
+              <a:rPr lang="en-US" sz="950" dirty="0">
+                <a:solidFill>
+                  <a:srgbClr val="8B949E"/>
+                </a:solidFill>
+                <a:latin typeface="Consolas" pitchFamily="34" charset="0"/>
+                <a:ea typeface="Consolas" pitchFamily="34" charset="-122"/>
+                <a:cs typeface="Consolas" pitchFamily="34" charset="-120"/>
+              </a:rPr>
+              <a:t># garak v0.14.x</a:t>
+            </a:r>
+            <a:endParaRPr lang="en-US" sz="950" dirty="0"/>
+          </a:p>
+        </p:txBody>
+      </p:sp>
+      <p:sp>
+        <p:nvSpPr>
+          <p:cNvPr id="39" name="Text 37"/>
+          <p:cNvSpPr/>
+          <p:nvPr/>
+        </p:nvSpPr>
+        <p:spPr>
+          <a:xfrm>
+            <a:off x="5897880" y="4078224"/>
+            <a:ext cx="5852160" cy="228600"/>
+          </a:xfrm>
+          <a:prstGeom prst="rect">
+            <a:avLst/>
+          </a:prstGeom>
+          <a:noFill/>
+          <a:ln/>
+        </p:spPr>
+        <p:txBody>
+          <a:bodyPr wrap="square" lIns="0" tIns="0" rIns="0" bIns="0" rtlCol="0" anchor="ctr"/>
+          <a:lstStyle/>
+          <a:p>
+            <a:pPr marL="0" indent="0">
+              <a:buNone/>
+            </a:pPr>
+            <a:endParaRPr lang="en-US" sz="950" dirty="0"/>
+          </a:p>
+        </p:txBody>
+      </p:sp>
+      <p:sp>
+        <p:nvSpPr>
+          <p:cNvPr id="40" name="Text 38"/>
+          <p:cNvSpPr/>
+          <p:nvPr/>
+        </p:nvSpPr>
+        <p:spPr>
+          <a:xfrm>
+            <a:off x="5897880" y="4098969"/>
+            <a:ext cx="5852160" cy="228600"/>
+          </a:xfrm>
+          <a:prstGeom prst="rect">
+            <a:avLst/>
+          </a:prstGeom>
+          <a:noFill/>
+          <a:ln/>
+        </p:spPr>
+        <p:txBody>
+          <a:bodyPr wrap="square" lIns="0" tIns="0" rIns="0" bIns="0" rtlCol="0" anchor="ctr"/>
+          <a:lstStyle/>
+          <a:p>
+            <a:pPr marL="0" indent="0">
+              <a:buNone/>
+            </a:pPr>
+            <a:r>
+              <a:rPr lang="en-US" sz="950" dirty="0">
+                <a:solidFill>
+                  <a:srgbClr val="8B949E"/>
+                </a:solidFill>
+                <a:latin typeface="Consolas" pitchFamily="34" charset="0"/>
+                <a:ea typeface="Consolas" pitchFamily="34" charset="-122"/>
+                <a:cs typeface="Consolas" pitchFamily="34" charset="-120"/>
+              </a:rPr>
               <a:t># 오류 시:</a:t>
             </a:r>
             <a:endParaRPr lang="en-US" sz="950" dirty="0"/>
@@ -23627,7 +23496,7 @@
         </p:nvSpPr>
         <p:spPr>
           <a:xfrm>
-            <a:off x="5897880" y="4572000"/>
+            <a:off x="5897880" y="4345857"/>
             <a:ext cx="5852160" cy="228600"/>
           </a:xfrm>
           <a:prstGeom prst="rect">
@@ -23809,8 +23678,8 @@
         </p:nvSpPr>
         <p:spPr>
           <a:xfrm>
-            <a:off x="274320" y="640080"/>
-            <a:ext cx="5303520" cy="1737360"/>
+            <a:off x="274320" y="3698206"/>
+            <a:ext cx="5303520" cy="851867"/>
           </a:xfrm>
           <a:prstGeom prst="rect">
             <a:avLst/>
@@ -23848,7 +23717,7 @@
         </p:nvSpPr>
         <p:spPr>
           <a:xfrm>
-            <a:off x="274320" y="640080"/>
+            <a:off x="274320" y="3698207"/>
             <a:ext cx="5303520" cy="329184"/>
           </a:xfrm>
           <a:prstGeom prst="rect">
@@ -23880,7 +23749,7 @@
         </p:nvSpPr>
         <p:spPr>
           <a:xfrm>
-            <a:off x="384048" y="640080"/>
+            <a:off x="384048" y="3698205"/>
             <a:ext cx="5084064" cy="329184"/>
           </a:xfrm>
           <a:prstGeom prst="rect">
@@ -23919,7 +23788,7 @@
         </p:nvSpPr>
         <p:spPr>
           <a:xfrm>
-            <a:off x="411480" y="1042416"/>
+            <a:off x="304800" y="4124878"/>
             <a:ext cx="5029200" cy="246888"/>
           </a:xfrm>
           <a:prstGeom prst="rect">
@@ -23952,91 +23821,13 @@
       </p:sp>
       <p:sp>
         <p:nvSpPr>
-          <p:cNvPr id="8" name="Text 6"/>
-          <p:cNvSpPr/>
-          <p:nvPr/>
-        </p:nvSpPr>
-        <p:spPr>
-          <a:xfrm>
-            <a:off x="411480" y="1316736"/>
-            <a:ext cx="5029200" cy="246888"/>
-          </a:xfrm>
-          <a:prstGeom prst="rect">
-            <a:avLst/>
-          </a:prstGeom>
-          <a:noFill/>
-          <a:ln/>
-        </p:spPr>
-        <p:txBody>
-          <a:bodyPr wrap="square" rtlCol="0" anchor="ctr"/>
-          <a:lstStyle/>
-          <a:p>
-            <a:pPr marL="0" indent="0">
-              <a:buNone/>
-            </a:pPr>
-            <a:r>
-              <a:rPr lang="en-US" sz="1000" dirty="0">
-                <a:solidFill>
-                  <a:srgbClr val="111848"/>
-                </a:solidFill>
-                <a:latin typeface="Arial" pitchFamily="34" charset="0"/>
-                <a:ea typeface="Arial" pitchFamily="34" charset="-122"/>
-                <a:cs typeface="Arial" pitchFamily="34" charset="-120"/>
-              </a:rPr>
-              <a:t>약 15~30초 소요 (6종 프로브 × API 호출)</a:t>
-            </a:r>
-            <a:endParaRPr lang="en-US" sz="1000" dirty="0"/>
-          </a:p>
-        </p:txBody>
-      </p:sp>
-      <p:sp>
-        <p:nvSpPr>
-          <p:cNvPr id="9" name="Text 7"/>
-          <p:cNvSpPr/>
-          <p:nvPr/>
-        </p:nvSpPr>
-        <p:spPr>
-          <a:xfrm>
-            <a:off x="411480" y="1591056"/>
-            <a:ext cx="5029200" cy="246888"/>
-          </a:xfrm>
-          <a:prstGeom prst="rect">
-            <a:avLst/>
-          </a:prstGeom>
-          <a:noFill/>
-          <a:ln/>
-        </p:spPr>
-        <p:txBody>
-          <a:bodyPr wrap="square" rtlCol="0" anchor="ctr"/>
-          <a:lstStyle/>
-          <a:p>
-            <a:pPr marL="0" indent="0">
-              <a:buNone/>
-            </a:pPr>
-            <a:r>
-              <a:rPr lang="en-US" sz="1000" b="1" dirty="0">
-                <a:solidFill>
-                  <a:srgbClr val="F59E0B"/>
-                </a:solidFill>
-                <a:latin typeface="Arial" pitchFamily="34" charset="0"/>
-                <a:ea typeface="Arial" pitchFamily="34" charset="-122"/>
-                <a:cs typeface="Arial" pitchFamily="34" charset="-120"/>
-              </a:rPr>
-              <a:t>⚠️ GARAK_RUNS 경로 (Cell 4 출력) 메모 필수</a:t>
-            </a:r>
-            <a:endParaRPr lang="en-US" sz="1000" dirty="0"/>
-          </a:p>
-        </p:txBody>
-      </p:sp>
-      <p:sp>
-        <p:nvSpPr>
           <p:cNvPr id="10" name="Shape 8"/>
           <p:cNvSpPr/>
           <p:nvPr/>
         </p:nvSpPr>
         <p:spPr>
           <a:xfrm>
-            <a:off x="274320" y="2487168"/>
+            <a:off x="274320" y="4659802"/>
             <a:ext cx="5303520" cy="1554480"/>
           </a:xfrm>
           <a:prstGeom prst="rect">
@@ -24075,7 +23866,7 @@
         </p:nvSpPr>
         <p:spPr>
           <a:xfrm>
-            <a:off x="274320" y="2487168"/>
+            <a:off x="274320" y="4659802"/>
             <a:ext cx="5303520" cy="329184"/>
           </a:xfrm>
           <a:prstGeom prst="rect">
@@ -24107,7 +23898,7 @@
         </p:nvSpPr>
         <p:spPr>
           <a:xfrm>
-            <a:off x="384048" y="2487168"/>
+            <a:off x="384048" y="4659802"/>
             <a:ext cx="5084064" cy="329184"/>
           </a:xfrm>
           <a:prstGeom prst="rect">
@@ -24146,7 +23937,7 @@
         </p:nvSpPr>
         <p:spPr>
           <a:xfrm>
-            <a:off x="411480" y="2889504"/>
+            <a:off x="411480" y="5062138"/>
             <a:ext cx="5029200" cy="246888"/>
           </a:xfrm>
           <a:prstGeom prst="rect">
@@ -24171,38 +23962,10 @@
                 <a:ea typeface="Arial" pitchFamily="34" charset="-122"/>
                 <a:cs typeface="Arial" pitchFamily="34" charset="-120"/>
               </a:rPr>
-              <a:t>① 6종 프로브 중 몇 개가 FAIL(취약)인가?</a:t>
-            </a:r>
-            <a:endParaRPr lang="en-US" sz="1000" dirty="0"/>
-          </a:p>
-        </p:txBody>
-      </p:sp>
-      <p:sp>
-        <p:nvSpPr>
-          <p:cNvPr id="14" name="Text 12"/>
-          <p:cNvSpPr/>
-          <p:nvPr/>
-        </p:nvSpPr>
-        <p:spPr>
-          <a:xfrm>
-            <a:off x="411480" y="3163824"/>
-            <a:ext cx="5029200" cy="246888"/>
-          </a:xfrm>
-          <a:prstGeom prst="rect">
-            <a:avLst/>
-          </a:prstGeom>
-          <a:noFill/>
-          <a:ln/>
-        </p:spPr>
-        <p:txBody>
-          <a:bodyPr wrap="square" rtlCol="0" anchor="ctr"/>
-          <a:lstStyle/>
-          <a:p>
-            <a:pPr marL="0" indent="0">
-              <a:buNone/>
-            </a:pPr>
-            <a:r>
-              <a:rPr lang="en-US" sz="1000" dirty="0">
+              <a:t>① </a:t>
+            </a:r>
+            <a:r>
+              <a:rPr lang="en-US" sz="1000" dirty="0" err="1">
                 <a:solidFill>
                   <a:srgbClr val="111848"/>
                 </a:solidFill>
@@ -24210,36 +23973,8 @@
                 <a:ea typeface="Arial" pitchFamily="34" charset="-122"/>
                 <a:cs typeface="Arial" pitchFamily="34" charset="-120"/>
               </a:rPr>
-              <a:t>② mitigation.MitigationBypass vs</a:t>
-            </a:r>
-            <a:endParaRPr lang="en-US" sz="1000" dirty="0"/>
-          </a:p>
-        </p:txBody>
-      </p:sp>
-      <p:sp>
-        <p:nvSpPr>
-          <p:cNvPr id="15" name="Text 13"/>
-          <p:cNvSpPr/>
-          <p:nvPr/>
-        </p:nvSpPr>
-        <p:spPr>
-          <a:xfrm>
-            <a:off x="411480" y="3438144"/>
-            <a:ext cx="5029200" cy="246888"/>
-          </a:xfrm>
-          <a:prstGeom prst="rect">
-            <a:avLst/>
-          </a:prstGeom>
-          <a:noFill/>
-          <a:ln/>
-        </p:spPr>
-        <p:txBody>
-          <a:bodyPr wrap="square" rtlCol="0" anchor="ctr"/>
-          <a:lstStyle/>
-          <a:p>
-            <a:pPr marL="0" indent="0">
-              <a:buNone/>
-            </a:pPr>
+              <a:t>프로브</a:t>
+            </a:r>
             <a:r>
               <a:rPr lang="en-US" sz="1000" dirty="0">
                 <a:solidFill>
@@ -24249,7 +23984,7 @@
                 <a:ea typeface="Arial" pitchFamily="34" charset="-122"/>
                 <a:cs typeface="Arial" pitchFamily="34" charset="-120"/>
               </a:rPr>
-              <a:t>   각 프로브 전용 디텍터 차이는?</a:t>
+              <a:t> 중 몇 개가 FAIL(취약)인가?</a:t>
             </a:r>
             <a:endParaRPr lang="en-US" sz="1000" dirty="0"/>
           </a:p>
@@ -24263,7 +23998,7 @@
         </p:nvSpPr>
         <p:spPr>
           <a:xfrm>
-            <a:off x="411480" y="3712464"/>
+            <a:off x="411480" y="5885098"/>
             <a:ext cx="5029200" cy="246888"/>
           </a:xfrm>
           <a:prstGeom prst="rect">
@@ -24342,7 +24077,7 @@
         <p:spPr>
           <a:xfrm>
             <a:off x="5760720" y="1005840"/>
-            <a:ext cx="6126480" cy="5138928"/>
+            <a:ext cx="6126480" cy="5208442"/>
           </a:xfrm>
           <a:prstGeom prst="rect">
             <a:avLst/>
@@ -24467,7 +24202,7 @@
                 <a:ea typeface="Consolas" pitchFamily="34" charset="-122"/>
                 <a:cs typeface="Consolas" pitchFamily="34" charset="-120"/>
               </a:rPr>
-              <a:t>DAN_PROBES = (</a:t>
+              <a:t>SCAN_PROBES = (</a:t>
             </a:r>
             <a:endParaRPr lang="en-US" sz="950" dirty="0"/>
           </a:p>
@@ -24514,13 +24249,13 @@
       </p:sp>
       <p:sp>
         <p:nvSpPr>
-          <p:cNvPr id="23" name="Text 21"/>
-          <p:cNvSpPr/>
-          <p:nvPr/>
-        </p:nvSpPr>
-        <p:spPr>
-          <a:xfrm>
-            <a:off x="5897880" y="2103120"/>
+          <p:cNvPr id="25" name="Text 23"/>
+          <p:cNvSpPr/>
+          <p:nvPr/>
+        </p:nvSpPr>
+        <p:spPr>
+          <a:xfrm>
+            <a:off x="6065520" y="2084832"/>
             <a:ext cx="5852160" cy="228600"/>
           </a:xfrm>
           <a:prstGeom prst="rect">
@@ -24533,50 +24268,19 @@
           <a:bodyPr wrap="square" lIns="0" tIns="0" rIns="0" bIns="0" rtlCol="0" anchor="ctr"/>
           <a:lstStyle/>
           <a:p>
-            <a:pPr marL="0" indent="0">
-              <a:buNone/>
-            </a:pPr>
-            <a:r>
-              <a:rPr lang="en-US" sz="950" dirty="0">
-                <a:solidFill>
-                  <a:srgbClr val="10B981"/>
+            <a:r>
+              <a:rPr lang="en-US" sz="600" dirty="0">
+                <a:solidFill>
+                  <a:srgbClr val="00B050"/>
                 </a:solidFill>
                 <a:latin typeface="Consolas" pitchFamily="34" charset="0"/>
                 <a:ea typeface="Consolas" pitchFamily="34" charset="-122"/>
                 <a:cs typeface="Consolas" pitchFamily="34" charset="-120"/>
               </a:rPr>
-              <a:t>    'promptinject.HijackHateHumans,'</a:t>
-            </a:r>
-            <a:endParaRPr lang="en-US" sz="950" dirty="0"/>
-          </a:p>
-        </p:txBody>
-      </p:sp>
-      <p:sp>
-        <p:nvSpPr>
-          <p:cNvPr id="24" name="Text 22"/>
-          <p:cNvSpPr/>
-          <p:nvPr/>
-        </p:nvSpPr>
-        <p:spPr>
-          <a:xfrm>
-            <a:off x="5897880" y="2350008"/>
-            <a:ext cx="5852160" cy="228600"/>
-          </a:xfrm>
-          <a:prstGeom prst="rect">
-            <a:avLst/>
-          </a:prstGeom>
-          <a:noFill/>
-          <a:ln/>
-        </p:spPr>
-        <p:txBody>
-          <a:bodyPr wrap="square" lIns="0" tIns="0" rIns="0" bIns="0" rtlCol="0" anchor="ctr"/>
-          <a:lstStyle/>
-          <a:p>
-            <a:pPr marL="0" indent="0">
-              <a:buNone/>
-            </a:pPr>
-            <a:r>
-              <a:rPr lang="en-US" sz="950" dirty="0">
+              <a:t>   </a:t>
+            </a:r>
+            <a:r>
+              <a:rPr lang="en-US" altLang="ko-KR" sz="800" dirty="0">
                 <a:solidFill>
                   <a:srgbClr val="10B981"/>
                 </a:solidFill>
@@ -24584,21 +24288,33 @@
                 <a:ea typeface="Consolas" pitchFamily="34" charset="-122"/>
                 <a:cs typeface="Consolas" pitchFamily="34" charset="-120"/>
               </a:rPr>
-              <a:t>    'latentinjection.LatentInjectionReport,'</a:t>
-            </a:r>
-            <a:endParaRPr lang="en-US" sz="950" dirty="0"/>
-          </a:p>
-        </p:txBody>
-      </p:sp>
-      <p:sp>
-        <p:nvSpPr>
-          <p:cNvPr id="25" name="Text 23"/>
-          <p:cNvSpPr/>
-          <p:nvPr/>
-        </p:nvSpPr>
-        <p:spPr>
-          <a:xfrm>
-            <a:off x="5897880" y="2596896"/>
+              <a:t>'</a:t>
+            </a:r>
+            <a:r>
+              <a:rPr lang="es-419" altLang="ko-KR" sz="1100" dirty="0">
+                <a:solidFill>
+                  <a:srgbClr val="00B050"/>
+                </a:solidFill>
+              </a:rPr>
+              <a:t>lmrc.Profanity,'</a:t>
+            </a:r>
+            <a:endParaRPr lang="en-US" sz="600" dirty="0">
+              <a:solidFill>
+                <a:srgbClr val="00B050"/>
+              </a:solidFill>
+            </a:endParaRPr>
+          </a:p>
+        </p:txBody>
+      </p:sp>
+      <p:sp>
+        <p:nvSpPr>
+          <p:cNvPr id="28" name="Text 26"/>
+          <p:cNvSpPr/>
+          <p:nvPr/>
+        </p:nvSpPr>
+        <p:spPr>
+          <a:xfrm>
+            <a:off x="5897880" y="2317143"/>
             <a:ext cx="5852160" cy="228600"/>
           </a:xfrm>
           <a:prstGeom prst="rect">
@@ -24617,13 +24333,13 @@
             <a:r>
               <a:rPr lang="en-US" sz="950" dirty="0">
                 <a:solidFill>
-                  <a:srgbClr val="10B981"/>
+                  <a:srgbClr val="E6EDF3"/>
                 </a:solidFill>
                 <a:latin typeface="Consolas" pitchFamily="34" charset="0"/>
                 <a:ea typeface="Consolas" pitchFamily="34" charset="-122"/>
                 <a:cs typeface="Consolas" pitchFamily="34" charset="-120"/>
               </a:rPr>
-              <a:t>    'encoding.InjectBase64,'</a:t>
+              <a:t>)</a:t>
             </a:r>
             <a:endParaRPr lang="en-US" sz="950" dirty="0"/>
           </a:p>
@@ -24631,13 +24347,13 @@
       </p:sp>
       <p:sp>
         <p:nvSpPr>
-          <p:cNvPr id="26" name="Text 24"/>
-          <p:cNvSpPr/>
-          <p:nvPr/>
-        </p:nvSpPr>
-        <p:spPr>
-          <a:xfrm>
-            <a:off x="5897880" y="2843784"/>
+          <p:cNvPr id="29" name="Text 27"/>
+          <p:cNvSpPr/>
+          <p:nvPr/>
+        </p:nvSpPr>
+        <p:spPr>
+          <a:xfrm>
+            <a:off x="5897880" y="3584448"/>
             <a:ext cx="5852160" cy="228600"/>
           </a:xfrm>
           <a:prstGeom prst="rect">
@@ -24653,16 +24369,44 @@
             <a:pPr marL="0" indent="0">
               <a:buNone/>
             </a:pPr>
+            <a:endParaRPr lang="en-US" sz="950" dirty="0"/>
+          </a:p>
+        </p:txBody>
+      </p:sp>
+      <p:sp>
+        <p:nvSpPr>
+          <p:cNvPr id="30" name="Text 28"/>
+          <p:cNvSpPr/>
+          <p:nvPr/>
+        </p:nvSpPr>
+        <p:spPr>
+          <a:xfrm>
+            <a:off x="5897880" y="2810919"/>
+            <a:ext cx="5852160" cy="228600"/>
+          </a:xfrm>
+          <a:prstGeom prst="rect">
+            <a:avLst/>
+          </a:prstGeom>
+          <a:noFill/>
+          <a:ln/>
+        </p:spPr>
+        <p:txBody>
+          <a:bodyPr wrap="square" lIns="0" tIns="0" rIns="0" bIns="0" rtlCol="0" anchor="ctr"/>
+          <a:lstStyle/>
+          <a:p>
+            <a:pPr marL="0" indent="0">
+              <a:buNone/>
+            </a:pPr>
             <a:r>
               <a:rPr lang="en-US" sz="950" dirty="0">
                 <a:solidFill>
-                  <a:srgbClr val="10B981"/>
+                  <a:srgbClr val="E6EDF3"/>
                 </a:solidFill>
                 <a:latin typeface="Consolas" pitchFamily="34" charset="0"/>
                 <a:ea typeface="Consolas" pitchFamily="34" charset="-122"/>
                 <a:cs typeface="Consolas" pitchFamily="34" charset="-120"/>
               </a:rPr>
-              <a:t>    'web_injection.MarkdownImageExfil,'</a:t>
+              <a:t>result = subprocess.run([</a:t>
             </a:r>
             <a:endParaRPr lang="en-US" sz="950" dirty="0"/>
           </a:p>
@@ -24670,13 +24414,13 @@
       </p:sp>
       <p:sp>
         <p:nvSpPr>
-          <p:cNvPr id="27" name="Text 25"/>
-          <p:cNvSpPr/>
-          <p:nvPr/>
-        </p:nvSpPr>
-        <p:spPr>
-          <a:xfrm>
-            <a:off x="5897880" y="3090672"/>
+          <p:cNvPr id="31" name="Text 29"/>
+          <p:cNvSpPr/>
+          <p:nvPr/>
+        </p:nvSpPr>
+        <p:spPr>
+          <a:xfrm>
+            <a:off x="5897880" y="3057807"/>
             <a:ext cx="5852160" cy="228600"/>
           </a:xfrm>
           <a:prstGeom prst="rect">
@@ -24695,13 +24439,13 @@
             <a:r>
               <a:rPr lang="en-US" sz="950" dirty="0">
                 <a:solidFill>
-                  <a:srgbClr val="10B981"/>
+                  <a:srgbClr val="E6EDF3"/>
                 </a:solidFill>
                 <a:latin typeface="Consolas" pitchFamily="34" charset="0"/>
                 <a:ea typeface="Consolas" pitchFamily="34" charset="-122"/>
                 <a:cs typeface="Consolas" pitchFamily="34" charset="-120"/>
               </a:rPr>
-              <a:t>    'realtoxicityprompts.RTPBlank'</a:t>
+              <a:t>    sys.executable, '-m', 'garak',</a:t>
             </a:r>
             <a:endParaRPr lang="en-US" sz="950" dirty="0"/>
           </a:p>
@@ -24709,13 +24453,13 @@
       </p:sp>
       <p:sp>
         <p:nvSpPr>
-          <p:cNvPr id="28" name="Text 26"/>
-          <p:cNvSpPr/>
-          <p:nvPr/>
-        </p:nvSpPr>
-        <p:spPr>
-          <a:xfrm>
-            <a:off x="5897880" y="3337560"/>
+          <p:cNvPr id="32" name="Text 30"/>
+          <p:cNvSpPr/>
+          <p:nvPr/>
+        </p:nvSpPr>
+        <p:spPr>
+          <a:xfrm>
+            <a:off x="5897880" y="3304695"/>
             <a:ext cx="5852160" cy="228600"/>
           </a:xfrm>
           <a:prstGeom prst="rect">
@@ -24740,7 +24484,7 @@
                 <a:ea typeface="Consolas" pitchFamily="34" charset="-122"/>
                 <a:cs typeface="Consolas" pitchFamily="34" charset="-120"/>
               </a:rPr>
-              <a:t>)</a:t>
+              <a:t>    '--target_type', 'litellm',</a:t>
             </a:r>
             <a:endParaRPr lang="en-US" sz="950" dirty="0"/>
           </a:p>
@@ -24748,41 +24492,13 @@
       </p:sp>
       <p:sp>
         <p:nvSpPr>
-          <p:cNvPr id="29" name="Text 27"/>
-          <p:cNvSpPr/>
-          <p:nvPr/>
-        </p:nvSpPr>
-        <p:spPr>
-          <a:xfrm>
-            <a:off x="5897880" y="3584448"/>
-            <a:ext cx="5852160" cy="228600"/>
-          </a:xfrm>
-          <a:prstGeom prst="rect">
-            <a:avLst/>
-          </a:prstGeom>
-          <a:noFill/>
-          <a:ln/>
-        </p:spPr>
-        <p:txBody>
-          <a:bodyPr wrap="square" lIns="0" tIns="0" rIns="0" bIns="0" rtlCol="0" anchor="ctr"/>
-          <a:lstStyle/>
-          <a:p>
-            <a:pPr marL="0" indent="0">
-              <a:buNone/>
-            </a:pPr>
-            <a:endParaRPr lang="en-US" sz="950" dirty="0"/>
-          </a:p>
-        </p:txBody>
-      </p:sp>
-      <p:sp>
-        <p:nvSpPr>
-          <p:cNvPr id="30" name="Text 28"/>
-          <p:cNvSpPr/>
-          <p:nvPr/>
-        </p:nvSpPr>
-        <p:spPr>
-          <a:xfrm>
-            <a:off x="5897880" y="3831336"/>
+          <p:cNvPr id="33" name="Text 31"/>
+          <p:cNvSpPr/>
+          <p:nvPr/>
+        </p:nvSpPr>
+        <p:spPr>
+          <a:xfrm>
+            <a:off x="5897880" y="3551583"/>
             <a:ext cx="5852160" cy="228600"/>
           </a:xfrm>
           <a:prstGeom prst="rect">
@@ -24807,38 +24523,10 @@
                 <a:ea typeface="Consolas" pitchFamily="34" charset="-122"/>
                 <a:cs typeface="Consolas" pitchFamily="34" charset="-120"/>
               </a:rPr>
-              <a:t>result = subprocess.run([</a:t>
-            </a:r>
-            <a:endParaRPr lang="en-US" sz="950" dirty="0"/>
-          </a:p>
-        </p:txBody>
-      </p:sp>
-      <p:sp>
-        <p:nvSpPr>
-          <p:cNvPr id="31" name="Text 29"/>
-          <p:cNvSpPr/>
-          <p:nvPr/>
-        </p:nvSpPr>
-        <p:spPr>
-          <a:xfrm>
-            <a:off x="5897880" y="4078224"/>
-            <a:ext cx="5852160" cy="228600"/>
-          </a:xfrm>
-          <a:prstGeom prst="rect">
-            <a:avLst/>
-          </a:prstGeom>
-          <a:noFill/>
-          <a:ln/>
-        </p:spPr>
-        <p:txBody>
-          <a:bodyPr wrap="square" lIns="0" tIns="0" rIns="0" bIns="0" rtlCol="0" anchor="ctr"/>
-          <a:lstStyle/>
-          <a:p>
-            <a:pPr marL="0" indent="0">
-              <a:buNone/>
-            </a:pPr>
-            <a:r>
-              <a:rPr lang="en-US" sz="950" dirty="0">
+              <a:t>    '--</a:t>
+            </a:r>
+            <a:r>
+              <a:rPr lang="en-US" sz="950" dirty="0" err="1">
                 <a:solidFill>
                   <a:srgbClr val="E6EDF3"/>
                 </a:solidFill>
@@ -24846,36 +24534,8 @@
                 <a:ea typeface="Consolas" pitchFamily="34" charset="-122"/>
                 <a:cs typeface="Consolas" pitchFamily="34" charset="-120"/>
               </a:rPr>
-              <a:t>    sys.executable, '-m', 'garak',</a:t>
-            </a:r>
-            <a:endParaRPr lang="en-US" sz="950" dirty="0"/>
-          </a:p>
-        </p:txBody>
-      </p:sp>
-      <p:sp>
-        <p:nvSpPr>
-          <p:cNvPr id="32" name="Text 30"/>
-          <p:cNvSpPr/>
-          <p:nvPr/>
-        </p:nvSpPr>
-        <p:spPr>
-          <a:xfrm>
-            <a:off x="5897880" y="4325112"/>
-            <a:ext cx="5852160" cy="228600"/>
-          </a:xfrm>
-          <a:prstGeom prst="rect">
-            <a:avLst/>
-          </a:prstGeom>
-          <a:noFill/>
-          <a:ln/>
-        </p:spPr>
-        <p:txBody>
-          <a:bodyPr wrap="square" lIns="0" tIns="0" rIns="0" bIns="0" rtlCol="0" anchor="ctr"/>
-          <a:lstStyle/>
-          <a:p>
-            <a:pPr marL="0" indent="0">
-              <a:buNone/>
-            </a:pPr>
+              <a:t>target_name</a:t>
+            </a:r>
             <a:r>
               <a:rPr lang="en-US" sz="950" dirty="0">
                 <a:solidFill>
@@ -24885,7 +24545,7 @@
                 <a:ea typeface="Consolas" pitchFamily="34" charset="-122"/>
                 <a:cs typeface="Consolas" pitchFamily="34" charset="-120"/>
               </a:rPr>
-              <a:t>    '--target_type', 'litellm',</a:t>
+              <a:t>’, GARAK_MODEL,</a:t>
             </a:r>
             <a:endParaRPr lang="en-US" sz="950" dirty="0"/>
           </a:p>
@@ -24893,13 +24553,13 @@
       </p:sp>
       <p:sp>
         <p:nvSpPr>
-          <p:cNvPr id="33" name="Text 31"/>
-          <p:cNvSpPr/>
-          <p:nvPr/>
-        </p:nvSpPr>
-        <p:spPr>
-          <a:xfrm>
-            <a:off x="5897880" y="4572000"/>
+          <p:cNvPr id="35" name="Text 33"/>
+          <p:cNvSpPr/>
+          <p:nvPr/>
+        </p:nvSpPr>
+        <p:spPr>
+          <a:xfrm>
+            <a:off x="5897880" y="3838882"/>
             <a:ext cx="5852160" cy="228600"/>
           </a:xfrm>
           <a:prstGeom prst="rect">
@@ -24924,7 +24584,7 @@
                 <a:ea typeface="Consolas" pitchFamily="34" charset="-122"/>
                 <a:cs typeface="Consolas" pitchFamily="34" charset="-120"/>
               </a:rPr>
-              <a:t>    '--target_name',</a:t>
+              <a:t>    '--probes’, SCAN_PROBES,</a:t>
             </a:r>
             <a:endParaRPr lang="en-US" sz="950" dirty="0"/>
           </a:p>
@@ -24932,13 +24592,13 @@
       </p:sp>
       <p:sp>
         <p:nvSpPr>
-          <p:cNvPr id="34" name="Text 32"/>
-          <p:cNvSpPr/>
-          <p:nvPr/>
-        </p:nvSpPr>
-        <p:spPr>
-          <a:xfrm>
-            <a:off x="5897880" y="4818888"/>
+          <p:cNvPr id="36" name="Text 34"/>
+          <p:cNvSpPr/>
+          <p:nvPr/>
+        </p:nvSpPr>
+        <p:spPr>
+          <a:xfrm>
+            <a:off x="5897880" y="4085770"/>
             <a:ext cx="5852160" cy="228600"/>
           </a:xfrm>
           <a:prstGeom prst="rect">
@@ -24963,7 +24623,7 @@
                 <a:ea typeface="Consolas" pitchFamily="34" charset="-122"/>
                 <a:cs typeface="Consolas" pitchFamily="34" charset="-120"/>
               </a:rPr>
-              <a:t>    'gemini/gemini-2.5-flash-lite',</a:t>
+              <a:t>    '-g', '1'</a:t>
             </a:r>
             <a:endParaRPr lang="en-US" sz="950" dirty="0"/>
           </a:p>
@@ -24971,13 +24631,13 @@
       </p:sp>
       <p:sp>
         <p:nvSpPr>
-          <p:cNvPr id="35" name="Text 33"/>
-          <p:cNvSpPr/>
-          <p:nvPr/>
-        </p:nvSpPr>
-        <p:spPr>
-          <a:xfrm>
-            <a:off x="5897880" y="5065776"/>
+          <p:cNvPr id="37" name="Text 35"/>
+          <p:cNvSpPr/>
+          <p:nvPr/>
+        </p:nvSpPr>
+        <p:spPr>
+          <a:xfrm>
+            <a:off x="5897880" y="4332658"/>
             <a:ext cx="5852160" cy="228600"/>
           </a:xfrm>
           <a:prstGeom prst="rect">
@@ -25002,7 +24662,7 @@
                 <a:ea typeface="Consolas" pitchFamily="34" charset="-122"/>
                 <a:cs typeface="Consolas" pitchFamily="34" charset="-120"/>
               </a:rPr>
-              <a:t>    '--probes', DAN_PROBES,</a:t>
+              <a:t>], capture_output=True, text=True)</a:t>
             </a:r>
             <a:endParaRPr lang="en-US" sz="950" dirty="0"/>
           </a:p>
@@ -25010,13 +24670,13 @@
       </p:sp>
       <p:sp>
         <p:nvSpPr>
-          <p:cNvPr id="36" name="Text 34"/>
-          <p:cNvSpPr/>
-          <p:nvPr/>
-        </p:nvSpPr>
-        <p:spPr>
-          <a:xfrm>
-            <a:off x="5897880" y="5312664"/>
+          <p:cNvPr id="38" name="Text 36"/>
+          <p:cNvSpPr/>
+          <p:nvPr/>
+        </p:nvSpPr>
+        <p:spPr>
+          <a:xfrm>
+            <a:off x="5897880" y="4579546"/>
             <a:ext cx="5852160" cy="228600"/>
           </a:xfrm>
           <a:prstGeom prst="rect">
@@ -25035,90 +24695,12 @@
             <a:r>
               <a:rPr lang="en-US" sz="950" dirty="0">
                 <a:solidFill>
-                  <a:srgbClr val="E6EDF3"/>
+                  <a:srgbClr val="10B981"/>
                 </a:solidFill>
                 <a:latin typeface="Consolas" pitchFamily="34" charset="0"/>
                 <a:ea typeface="Consolas" pitchFamily="34" charset="-122"/>
                 <a:cs typeface="Consolas" pitchFamily="34" charset="-120"/>
               </a:rPr>
-              <a:t>    '-g', '1'</a:t>
-            </a:r>
-            <a:endParaRPr lang="en-US" sz="950" dirty="0"/>
-          </a:p>
-        </p:txBody>
-      </p:sp>
-      <p:sp>
-        <p:nvSpPr>
-          <p:cNvPr id="37" name="Text 35"/>
-          <p:cNvSpPr/>
-          <p:nvPr/>
-        </p:nvSpPr>
-        <p:spPr>
-          <a:xfrm>
-            <a:off x="5897880" y="5559552"/>
-            <a:ext cx="5852160" cy="228600"/>
-          </a:xfrm>
-          <a:prstGeom prst="rect">
-            <a:avLst/>
-          </a:prstGeom>
-          <a:noFill/>
-          <a:ln/>
-        </p:spPr>
-        <p:txBody>
-          <a:bodyPr wrap="square" lIns="0" tIns="0" rIns="0" bIns="0" rtlCol="0" anchor="ctr"/>
-          <a:lstStyle/>
-          <a:p>
-            <a:pPr marL="0" indent="0">
-              <a:buNone/>
-            </a:pPr>
-            <a:r>
-              <a:rPr lang="en-US" sz="950" dirty="0">
-                <a:solidFill>
-                  <a:srgbClr val="E6EDF3"/>
-                </a:solidFill>
-                <a:latin typeface="Consolas" pitchFamily="34" charset="0"/>
-                <a:ea typeface="Consolas" pitchFamily="34" charset="-122"/>
-                <a:cs typeface="Consolas" pitchFamily="34" charset="-120"/>
-              </a:rPr>
-              <a:t>], capture_output=True, text=True)</a:t>
-            </a:r>
-            <a:endParaRPr lang="en-US" sz="950" dirty="0"/>
-          </a:p>
-        </p:txBody>
-      </p:sp>
-      <p:sp>
-        <p:nvSpPr>
-          <p:cNvPr id="38" name="Text 36"/>
-          <p:cNvSpPr/>
-          <p:nvPr/>
-        </p:nvSpPr>
-        <p:spPr>
-          <a:xfrm>
-            <a:off x="5897880" y="5806440"/>
-            <a:ext cx="5852160" cy="228600"/>
-          </a:xfrm>
-          <a:prstGeom prst="rect">
-            <a:avLst/>
-          </a:prstGeom>
-          <a:noFill/>
-          <a:ln/>
-        </p:spPr>
-        <p:txBody>
-          <a:bodyPr wrap="square" lIns="0" tIns="0" rIns="0" bIns="0" rtlCol="0" anchor="ctr"/>
-          <a:lstStyle/>
-          <a:p>
-            <a:pPr marL="0" indent="0">
-              <a:buNone/>
-            </a:pPr>
-            <a:r>
-              <a:rPr lang="en-US" sz="950" dirty="0">
-                <a:solidFill>
-                  <a:srgbClr val="10B981"/>
-                </a:solidFill>
-                <a:latin typeface="Consolas" pitchFamily="34" charset="0"/>
-                <a:ea typeface="Consolas" pitchFamily="34" charset="-122"/>
-                <a:cs typeface="Consolas" pitchFamily="34" charset="-120"/>
-              </a:rPr>
               <a:t>print(result.stdout)</a:t>
             </a:r>
             <a:endParaRPr lang="en-US" sz="950" dirty="0"/>
@@ -25161,6 +24743,640 @@
               <a:t>7 / 19</a:t>
             </a:r>
             <a:endParaRPr lang="en-US" sz="900" dirty="0"/>
+          </a:p>
+        </p:txBody>
+      </p:sp>
+      <p:sp>
+        <p:nvSpPr>
+          <p:cNvPr id="40" name="Shape 14">
+            <a:extLst>
+              <a:ext uri="{FF2B5EF4-FFF2-40B4-BE49-F238E27FC236}">
+                <a16:creationId xmlns:a16="http://schemas.microsoft.com/office/drawing/2014/main" id="{D8B90CBA-9C40-247F-DF7F-B89B3C1FE172}"/>
+              </a:ext>
+            </a:extLst>
+          </p:cNvPr>
+          <p:cNvSpPr/>
+          <p:nvPr/>
+        </p:nvSpPr>
+        <p:spPr>
+          <a:xfrm>
+            <a:off x="274320" y="639538"/>
+            <a:ext cx="5303520" cy="2961179"/>
+          </a:xfrm>
+          <a:prstGeom prst="rect">
+            <a:avLst/>
+          </a:prstGeom>
+          <a:solidFill>
+            <a:srgbClr val="FFFFFF"/>
+          </a:solidFill>
+          <a:ln w="15240">
+            <a:solidFill>
+              <a:srgbClr val="2563EB"/>
+            </a:solidFill>
+            <a:prstDash val="solid"/>
+          </a:ln>
+          <a:effectLst>
+            <a:outerShdw blurRad="63500" dist="25400" dir="8100000" algn="bl" rotWithShape="0">
+              <a:srgbClr val="000000">
+                <a:alpha val="10000"/>
+              </a:srgbClr>
+            </a:outerShdw>
+          </a:effectLst>
+        </p:spPr>
+        <p:txBody>
+          <a:bodyPr/>
+          <a:lstStyle/>
+          <a:p>
+            <a:endParaRPr lang="ko-KR" altLang="en-US"/>
+          </a:p>
+        </p:txBody>
+      </p:sp>
+      <p:sp>
+        <p:nvSpPr>
+          <p:cNvPr id="41" name="Shape 15">
+            <a:extLst>
+              <a:ext uri="{FF2B5EF4-FFF2-40B4-BE49-F238E27FC236}">
+                <a16:creationId xmlns:a16="http://schemas.microsoft.com/office/drawing/2014/main" id="{D47D0772-E6B2-0867-4711-2C3C2437E1A8}"/>
+              </a:ext>
+            </a:extLst>
+          </p:cNvPr>
+          <p:cNvSpPr/>
+          <p:nvPr/>
+        </p:nvSpPr>
+        <p:spPr>
+          <a:xfrm>
+            <a:off x="274320" y="639539"/>
+            <a:ext cx="5303520" cy="329184"/>
+          </a:xfrm>
+          <a:prstGeom prst="rect">
+            <a:avLst/>
+          </a:prstGeom>
+          <a:solidFill>
+            <a:srgbClr val="2563EB"/>
+          </a:solidFill>
+          <a:ln w="12700">
+            <a:solidFill>
+              <a:srgbClr val="2563EB"/>
+            </a:solidFill>
+            <a:prstDash val="solid"/>
+          </a:ln>
+        </p:spPr>
+        <p:txBody>
+          <a:bodyPr/>
+          <a:lstStyle/>
+          <a:p>
+            <a:endParaRPr lang="ko-KR" altLang="en-US"/>
+          </a:p>
+        </p:txBody>
+      </p:sp>
+      <p:sp>
+        <p:nvSpPr>
+          <p:cNvPr id="42" name="Text 16">
+            <a:extLst>
+              <a:ext uri="{FF2B5EF4-FFF2-40B4-BE49-F238E27FC236}">
+                <a16:creationId xmlns:a16="http://schemas.microsoft.com/office/drawing/2014/main" id="{562310FE-8433-06EE-1940-A0BAEECA455A}"/>
+              </a:ext>
+            </a:extLst>
+          </p:cNvPr>
+          <p:cNvSpPr/>
+          <p:nvPr/>
+        </p:nvSpPr>
+        <p:spPr>
+          <a:xfrm>
+            <a:off x="384048" y="639539"/>
+            <a:ext cx="5084064" cy="329184"/>
+          </a:xfrm>
+          <a:prstGeom prst="rect">
+            <a:avLst/>
+          </a:prstGeom>
+          <a:noFill/>
+          <a:ln/>
+        </p:spPr>
+        <p:txBody>
+          <a:bodyPr wrap="square" lIns="0" tIns="0" rIns="0" bIns="0" rtlCol="0" anchor="ctr"/>
+          <a:lstStyle/>
+          <a:p>
+            <a:pPr marL="0" indent="0">
+              <a:buNone/>
+            </a:pPr>
+            <a:r>
+              <a:rPr lang="en-US" sz="1100" b="1" dirty="0">
+                <a:solidFill>
+                  <a:srgbClr val="FFFFFF"/>
+                </a:solidFill>
+                <a:latin typeface="Arial" pitchFamily="34" charset="0"/>
+                <a:ea typeface="Arial" pitchFamily="34" charset="-122"/>
+                <a:cs typeface="Arial" pitchFamily="34" charset="-120"/>
+              </a:rPr>
+              <a:t>Garak </a:t>
+            </a:r>
+            <a:r>
+              <a:rPr lang="en-US" sz="1100" b="1" dirty="0" err="1">
+                <a:solidFill>
+                  <a:srgbClr val="FFFFFF"/>
+                </a:solidFill>
+                <a:latin typeface="Arial" pitchFamily="34" charset="0"/>
+                <a:ea typeface="Arial" pitchFamily="34" charset="-122"/>
+                <a:cs typeface="Arial" pitchFamily="34" charset="-120"/>
+              </a:rPr>
+              <a:t>프로브</a:t>
+            </a:r>
+            <a:r>
+              <a:rPr lang="en-US" sz="1100" b="1" dirty="0">
+                <a:solidFill>
+                  <a:srgbClr val="FFFFFF"/>
+                </a:solidFill>
+                <a:latin typeface="Arial" pitchFamily="34" charset="0"/>
+                <a:ea typeface="Arial" pitchFamily="34" charset="-122"/>
+                <a:cs typeface="Arial" pitchFamily="34" charset="-120"/>
+              </a:rPr>
+              <a:t> </a:t>
+            </a:r>
+            <a:r>
+              <a:rPr lang="ko-KR" altLang="en-US" sz="1100" b="1" dirty="0">
+                <a:solidFill>
+                  <a:srgbClr val="FFFFFF"/>
+                </a:solidFill>
+                <a:latin typeface="Arial" pitchFamily="34" charset="0"/>
+                <a:ea typeface="Arial" pitchFamily="34" charset="-122"/>
+                <a:cs typeface="Arial" pitchFamily="34" charset="-120"/>
+              </a:rPr>
+              <a:t>예시</a:t>
+            </a:r>
+            <a:endParaRPr lang="en-US" sz="1100" dirty="0"/>
+          </a:p>
+        </p:txBody>
+      </p:sp>
+      <p:sp>
+        <p:nvSpPr>
+          <p:cNvPr id="43" name="Text 17">
+            <a:extLst>
+              <a:ext uri="{FF2B5EF4-FFF2-40B4-BE49-F238E27FC236}">
+                <a16:creationId xmlns:a16="http://schemas.microsoft.com/office/drawing/2014/main" id="{BEC0EF73-2D37-2433-4874-FA94897358B6}"/>
+              </a:ext>
+            </a:extLst>
+          </p:cNvPr>
+          <p:cNvSpPr/>
+          <p:nvPr/>
+        </p:nvSpPr>
+        <p:spPr>
+          <a:xfrm>
+            <a:off x="411480" y="1041875"/>
+            <a:ext cx="5029200" cy="246888"/>
+          </a:xfrm>
+          <a:prstGeom prst="rect">
+            <a:avLst/>
+          </a:prstGeom>
+          <a:noFill/>
+          <a:ln/>
+        </p:spPr>
+        <p:txBody>
+          <a:bodyPr wrap="square" rtlCol="0" anchor="ctr"/>
+          <a:lstStyle/>
+          <a:p>
+            <a:pPr marL="0" indent="0">
+              <a:buNone/>
+            </a:pPr>
+            <a:r>
+              <a:rPr lang="en-US" sz="950" dirty="0">
+                <a:solidFill>
+                  <a:srgbClr val="111848"/>
+                </a:solidFill>
+                <a:latin typeface="Arial" pitchFamily="34" charset="0"/>
+                <a:ea typeface="Arial" pitchFamily="34" charset="-122"/>
+                <a:cs typeface="Arial" pitchFamily="34" charset="-120"/>
+              </a:rPr>
+              <a:t>dan.Dan_11_0       — DAN 11.0 탈옥 프롬프트</a:t>
+            </a:r>
+            <a:endParaRPr lang="en-US" sz="950" dirty="0"/>
+          </a:p>
+        </p:txBody>
+      </p:sp>
+      <p:sp>
+        <p:nvSpPr>
+          <p:cNvPr id="44" name="Text 18">
+            <a:extLst>
+              <a:ext uri="{FF2B5EF4-FFF2-40B4-BE49-F238E27FC236}">
+                <a16:creationId xmlns:a16="http://schemas.microsoft.com/office/drawing/2014/main" id="{D9C2975A-5163-F423-D4B2-6327ABCAE53E}"/>
+              </a:ext>
+            </a:extLst>
+          </p:cNvPr>
+          <p:cNvSpPr/>
+          <p:nvPr/>
+        </p:nvSpPr>
+        <p:spPr>
+          <a:xfrm>
+            <a:off x="411480" y="1316195"/>
+            <a:ext cx="5029200" cy="246888"/>
+          </a:xfrm>
+          <a:prstGeom prst="rect">
+            <a:avLst/>
+          </a:prstGeom>
+          <a:noFill/>
+          <a:ln/>
+        </p:spPr>
+        <p:txBody>
+          <a:bodyPr wrap="square" rtlCol="0" anchor="ctr"/>
+          <a:lstStyle/>
+          <a:p>
+            <a:pPr marL="0" indent="0">
+              <a:buNone/>
+            </a:pPr>
+            <a:r>
+              <a:rPr lang="en-US" sz="950" dirty="0" err="1">
+                <a:solidFill>
+                  <a:srgbClr val="111848"/>
+                </a:solidFill>
+                <a:latin typeface="Arial" pitchFamily="34" charset="0"/>
+                <a:ea typeface="Arial" pitchFamily="34" charset="-122"/>
+                <a:cs typeface="Arial" pitchFamily="34" charset="-120"/>
+              </a:rPr>
+              <a:t>lmrc.Profanity</a:t>
+            </a:r>
+            <a:r>
+              <a:rPr lang="en-US" sz="950" dirty="0">
+                <a:solidFill>
+                  <a:srgbClr val="111848"/>
+                </a:solidFill>
+                <a:latin typeface="Arial" pitchFamily="34" charset="0"/>
+                <a:ea typeface="Arial" pitchFamily="34" charset="-122"/>
+                <a:cs typeface="Arial" pitchFamily="34" charset="-120"/>
+              </a:rPr>
+              <a:t> </a:t>
+            </a:r>
+            <a:r>
+              <a:rPr lang="ko-KR" altLang="en-US" sz="950" dirty="0">
+                <a:solidFill>
+                  <a:srgbClr val="111848"/>
+                </a:solidFill>
+                <a:latin typeface="Arial" pitchFamily="34" charset="0"/>
+                <a:ea typeface="Arial" pitchFamily="34" charset="-122"/>
+                <a:cs typeface="Arial" pitchFamily="34" charset="-120"/>
+              </a:rPr>
+              <a:t>       </a:t>
+            </a:r>
+            <a:r>
+              <a:rPr lang="en-US" sz="950" dirty="0">
+                <a:solidFill>
+                  <a:srgbClr val="111848"/>
+                </a:solidFill>
+                <a:latin typeface="Arial" pitchFamily="34" charset="0"/>
+                <a:ea typeface="Arial" pitchFamily="34" charset="-122"/>
+                <a:cs typeface="Arial" pitchFamily="34" charset="-120"/>
+              </a:rPr>
+              <a:t>— </a:t>
+            </a:r>
+            <a:r>
+              <a:rPr lang="ko-KR" altLang="en-US" sz="950" dirty="0">
+                <a:solidFill>
+                  <a:srgbClr val="111848"/>
+                </a:solidFill>
+                <a:latin typeface="Arial" pitchFamily="34" charset="0"/>
+                <a:ea typeface="Arial" pitchFamily="34" charset="-122"/>
+                <a:cs typeface="Arial" pitchFamily="34" charset="-120"/>
+              </a:rPr>
+              <a:t>욕설 유도</a:t>
+            </a:r>
+            <a:endParaRPr lang="en-US" sz="950" dirty="0"/>
+          </a:p>
+        </p:txBody>
+      </p:sp>
+      <p:sp>
+        <p:nvSpPr>
+          <p:cNvPr id="45" name="Text 19">
+            <a:extLst>
+              <a:ext uri="{FF2B5EF4-FFF2-40B4-BE49-F238E27FC236}">
+                <a16:creationId xmlns:a16="http://schemas.microsoft.com/office/drawing/2014/main" id="{EA116365-C731-281D-0643-C1083AFF8310}"/>
+              </a:ext>
+            </a:extLst>
+          </p:cNvPr>
+          <p:cNvSpPr/>
+          <p:nvPr/>
+        </p:nvSpPr>
+        <p:spPr>
+          <a:xfrm>
+            <a:off x="411480" y="1590515"/>
+            <a:ext cx="5029200" cy="246888"/>
+          </a:xfrm>
+          <a:prstGeom prst="rect">
+            <a:avLst/>
+          </a:prstGeom>
+          <a:noFill/>
+          <a:ln/>
+        </p:spPr>
+        <p:txBody>
+          <a:bodyPr wrap="square" rtlCol="0" anchor="ctr"/>
+          <a:lstStyle/>
+          <a:p>
+            <a:pPr marL="0" indent="0">
+              <a:buNone/>
+            </a:pPr>
+            <a:r>
+              <a:rPr lang="en-US" sz="950" dirty="0">
+                <a:solidFill>
+                  <a:schemeClr val="bg2">
+                    <a:lumMod val="50000"/>
+                  </a:schemeClr>
+                </a:solidFill>
+                <a:latin typeface="Arial" pitchFamily="34" charset="0"/>
+                <a:ea typeface="Arial" pitchFamily="34" charset="-122"/>
+                <a:cs typeface="Arial" pitchFamily="34" charset="-120"/>
+              </a:rPr>
+              <a:t>latentinjection.* — 간접 인젝션 (RAG 시나리오)</a:t>
+            </a:r>
+            <a:endParaRPr lang="en-US" sz="950" dirty="0">
+              <a:solidFill>
+                <a:schemeClr val="bg2">
+                  <a:lumMod val="50000"/>
+                </a:schemeClr>
+              </a:solidFill>
+            </a:endParaRPr>
+          </a:p>
+        </p:txBody>
+      </p:sp>
+      <p:sp>
+        <p:nvSpPr>
+          <p:cNvPr id="46" name="Text 20">
+            <a:extLst>
+              <a:ext uri="{FF2B5EF4-FFF2-40B4-BE49-F238E27FC236}">
+                <a16:creationId xmlns:a16="http://schemas.microsoft.com/office/drawing/2014/main" id="{3F02F354-B76E-5618-D0E4-DF795B822826}"/>
+              </a:ext>
+            </a:extLst>
+          </p:cNvPr>
+          <p:cNvSpPr/>
+          <p:nvPr/>
+        </p:nvSpPr>
+        <p:spPr>
+          <a:xfrm>
+            <a:off x="411480" y="1864835"/>
+            <a:ext cx="5029200" cy="246888"/>
+          </a:xfrm>
+          <a:prstGeom prst="rect">
+            <a:avLst/>
+          </a:prstGeom>
+          <a:noFill/>
+          <a:ln/>
+        </p:spPr>
+        <p:txBody>
+          <a:bodyPr wrap="square" rtlCol="0" anchor="ctr"/>
+          <a:lstStyle/>
+          <a:p>
+            <a:pPr marL="0" indent="0">
+              <a:buNone/>
+            </a:pPr>
+            <a:r>
+              <a:rPr lang="en-US" sz="950" dirty="0">
+                <a:solidFill>
+                  <a:schemeClr val="bg2">
+                    <a:lumMod val="50000"/>
+                  </a:schemeClr>
+                </a:solidFill>
+                <a:latin typeface="Arial" pitchFamily="34" charset="0"/>
+                <a:ea typeface="Arial" pitchFamily="34" charset="-122"/>
+                <a:cs typeface="Arial" pitchFamily="34" charset="-120"/>
+              </a:rPr>
+              <a:t>encoding.InjectBase64 — 인코딩 우회</a:t>
+            </a:r>
+            <a:endParaRPr lang="en-US" sz="950" dirty="0">
+              <a:solidFill>
+                <a:schemeClr val="bg2">
+                  <a:lumMod val="50000"/>
+                </a:schemeClr>
+              </a:solidFill>
+            </a:endParaRPr>
+          </a:p>
+        </p:txBody>
+      </p:sp>
+      <p:sp>
+        <p:nvSpPr>
+          <p:cNvPr id="47" name="Text 21">
+            <a:extLst>
+              <a:ext uri="{FF2B5EF4-FFF2-40B4-BE49-F238E27FC236}">
+                <a16:creationId xmlns:a16="http://schemas.microsoft.com/office/drawing/2014/main" id="{8A57D3A0-7E2F-0FA1-EDC9-5D4A6BDDBAB9}"/>
+              </a:ext>
+            </a:extLst>
+          </p:cNvPr>
+          <p:cNvSpPr/>
+          <p:nvPr/>
+        </p:nvSpPr>
+        <p:spPr>
+          <a:xfrm>
+            <a:off x="411480" y="2139155"/>
+            <a:ext cx="5029200" cy="246888"/>
+          </a:xfrm>
+          <a:prstGeom prst="rect">
+            <a:avLst/>
+          </a:prstGeom>
+          <a:noFill/>
+          <a:ln/>
+        </p:spPr>
+        <p:txBody>
+          <a:bodyPr wrap="square" rtlCol="0" anchor="ctr"/>
+          <a:lstStyle/>
+          <a:p>
+            <a:pPr marL="0" indent="0">
+              <a:buNone/>
+            </a:pPr>
+            <a:r>
+              <a:rPr lang="en-US" sz="950" dirty="0">
+                <a:solidFill>
+                  <a:schemeClr val="bg2">
+                    <a:lumMod val="50000"/>
+                  </a:schemeClr>
+                </a:solidFill>
+                <a:latin typeface="Arial" pitchFamily="34" charset="0"/>
+                <a:ea typeface="Arial" pitchFamily="34" charset="-122"/>
+                <a:cs typeface="Arial" pitchFamily="34" charset="-120"/>
+              </a:rPr>
+              <a:t>web_injection.*   — 마크다운 이미지 exfil</a:t>
+            </a:r>
+            <a:endParaRPr lang="en-US" sz="950" dirty="0">
+              <a:solidFill>
+                <a:schemeClr val="bg2">
+                  <a:lumMod val="50000"/>
+                </a:schemeClr>
+              </a:solidFill>
+            </a:endParaRPr>
+          </a:p>
+        </p:txBody>
+      </p:sp>
+      <p:sp>
+        <p:nvSpPr>
+          <p:cNvPr id="48" name="Text 22">
+            <a:extLst>
+              <a:ext uri="{FF2B5EF4-FFF2-40B4-BE49-F238E27FC236}">
+                <a16:creationId xmlns:a16="http://schemas.microsoft.com/office/drawing/2014/main" id="{919C45E1-2D2E-7561-CB36-E999C33BDD56}"/>
+              </a:ext>
+            </a:extLst>
+          </p:cNvPr>
+          <p:cNvSpPr/>
+          <p:nvPr/>
+        </p:nvSpPr>
+        <p:spPr>
+          <a:xfrm>
+            <a:off x="411480" y="2413475"/>
+            <a:ext cx="5029200" cy="246888"/>
+          </a:xfrm>
+          <a:prstGeom prst="rect">
+            <a:avLst/>
+          </a:prstGeom>
+          <a:noFill/>
+          <a:ln/>
+        </p:spPr>
+        <p:txBody>
+          <a:bodyPr wrap="square" rtlCol="0" anchor="ctr"/>
+          <a:lstStyle/>
+          <a:p>
+            <a:pPr marL="0" indent="0">
+              <a:buNone/>
+            </a:pPr>
+            <a:r>
+              <a:rPr lang="en-US" sz="950" dirty="0">
+                <a:solidFill>
+                  <a:schemeClr val="bg2">
+                    <a:lumMod val="50000"/>
+                  </a:schemeClr>
+                </a:solidFill>
+                <a:latin typeface="Arial" pitchFamily="34" charset="0"/>
+                <a:ea typeface="Arial" pitchFamily="34" charset="-122"/>
+                <a:cs typeface="Arial" pitchFamily="34" charset="-120"/>
+              </a:rPr>
+              <a:t>realtoxicity.*    — 독성 콘텐츠 탐지</a:t>
+            </a:r>
+            <a:endParaRPr lang="en-US" sz="950" dirty="0">
+              <a:solidFill>
+                <a:schemeClr val="bg2">
+                  <a:lumMod val="50000"/>
+                </a:schemeClr>
+              </a:solidFill>
+            </a:endParaRPr>
+          </a:p>
+        </p:txBody>
+      </p:sp>
+      <p:sp>
+        <p:nvSpPr>
+          <p:cNvPr id="34" name="Text 22">
+            <a:extLst>
+              <a:ext uri="{FF2B5EF4-FFF2-40B4-BE49-F238E27FC236}">
+                <a16:creationId xmlns:a16="http://schemas.microsoft.com/office/drawing/2014/main" id="{98A94D45-9C96-4330-7274-6C4044E917E2}"/>
+              </a:ext>
+            </a:extLst>
+          </p:cNvPr>
+          <p:cNvSpPr/>
+          <p:nvPr/>
+        </p:nvSpPr>
+        <p:spPr>
+          <a:xfrm>
+            <a:off x="438912" y="3243476"/>
+            <a:ext cx="5029200" cy="246888"/>
+          </a:xfrm>
+          <a:prstGeom prst="rect">
+            <a:avLst/>
+          </a:prstGeom>
+          <a:noFill/>
+          <a:ln/>
+        </p:spPr>
+        <p:txBody>
+          <a:bodyPr wrap="square" rtlCol="0" anchor="ctr"/>
+          <a:lstStyle/>
+          <a:p>
+            <a:r>
+              <a:rPr lang="en-US" altLang="ko-KR" sz="950" dirty="0">
+                <a:solidFill>
+                  <a:schemeClr val="bg2">
+                    <a:lumMod val="50000"/>
+                  </a:schemeClr>
+                </a:solidFill>
+              </a:rPr>
+              <a:t>(!python -m </a:t>
+            </a:r>
+            <a:r>
+              <a:rPr lang="en-US" altLang="ko-KR" sz="950" dirty="0" err="1">
+                <a:solidFill>
+                  <a:schemeClr val="bg2">
+                    <a:lumMod val="50000"/>
+                  </a:schemeClr>
+                </a:solidFill>
+              </a:rPr>
+              <a:t>garak</a:t>
+            </a:r>
+            <a:r>
+              <a:rPr lang="en-US" altLang="ko-KR" sz="950" dirty="0">
+                <a:solidFill>
+                  <a:schemeClr val="bg2">
+                    <a:lumMod val="50000"/>
+                  </a:schemeClr>
+                </a:solidFill>
+              </a:rPr>
+              <a:t> --</a:t>
+            </a:r>
+            <a:r>
+              <a:rPr lang="en-US" altLang="ko-KR" sz="950" dirty="0" err="1">
+                <a:solidFill>
+                  <a:schemeClr val="bg2">
+                    <a:lumMod val="50000"/>
+                  </a:schemeClr>
+                </a:solidFill>
+              </a:rPr>
+              <a:t>list_probes</a:t>
+            </a:r>
+            <a:r>
+              <a:rPr lang="en-US" altLang="ko-KR" sz="950" dirty="0">
+                <a:solidFill>
+                  <a:schemeClr val="bg2">
+                    <a:lumMod val="50000"/>
+                  </a:schemeClr>
+                </a:solidFill>
+              </a:rPr>
+              <a:t> </a:t>
+            </a:r>
+            <a:r>
+              <a:rPr lang="ko-KR" altLang="en-US" sz="950" dirty="0">
+                <a:solidFill>
+                  <a:schemeClr val="bg2">
+                    <a:lumMod val="50000"/>
+                  </a:schemeClr>
+                </a:solidFill>
+              </a:rPr>
+              <a:t>명령어를 통해 </a:t>
+            </a:r>
+            <a:r>
+              <a:rPr lang="en-US" altLang="ko-KR" sz="950" dirty="0">
+                <a:solidFill>
+                  <a:schemeClr val="bg2">
+                    <a:lumMod val="50000"/>
+                  </a:schemeClr>
+                </a:solidFill>
+              </a:rPr>
+              <a:t>probe list </a:t>
+            </a:r>
+            <a:r>
+              <a:rPr lang="ko-KR" altLang="en-US" sz="950" dirty="0">
+                <a:solidFill>
+                  <a:schemeClr val="bg2">
+                    <a:lumMod val="50000"/>
+                  </a:schemeClr>
+                </a:solidFill>
+              </a:rPr>
+              <a:t>들을 볼 수 있음</a:t>
+            </a:r>
+            <a:r>
+              <a:rPr lang="en-US" altLang="ko-KR" sz="950" dirty="0">
+                <a:solidFill>
+                  <a:schemeClr val="bg2">
+                    <a:lumMod val="50000"/>
+                  </a:schemeClr>
+                </a:solidFill>
+              </a:rPr>
+              <a:t>)</a:t>
+            </a:r>
+            <a:endParaRPr lang="en-US" sz="950" dirty="0">
+              <a:solidFill>
+                <a:schemeClr val="bg2">
+                  <a:lumMod val="50000"/>
+                </a:schemeClr>
+              </a:solidFill>
+            </a:endParaRPr>
           </a:p>
         </p:txBody>
       </p:sp>
@@ -26204,7 +26420,7 @@
           <a:bodyPr/>
           <a:lstStyle/>
           <a:p>
-            <a:endParaRPr lang="ko-KR" altLang="en-US"/>
+            <a:endParaRPr lang="ko-KR" altLang="en-US" dirty="0"/>
           </a:p>
         </p:txBody>
       </p:sp>
@@ -26320,13 +26536,13 @@
       </p:sp>
       <p:sp>
         <p:nvSpPr>
-          <p:cNvPr id="13" name="Text 11"/>
-          <p:cNvSpPr/>
-          <p:nvPr/>
-        </p:nvSpPr>
-        <p:spPr>
-          <a:xfrm>
-            <a:off x="411480" y="2852928"/>
+          <p:cNvPr id="14" name="Text 12"/>
+          <p:cNvSpPr/>
+          <p:nvPr/>
+        </p:nvSpPr>
+        <p:spPr>
+          <a:xfrm>
+            <a:off x="411480" y="3127248"/>
             <a:ext cx="5029200" cy="246888"/>
           </a:xfrm>
           <a:prstGeom prst="rect">
@@ -26343,15 +26559,15 @@
               <a:buNone/>
             </a:pPr>
             <a:r>
-              <a:rPr lang="en-US" sz="1000" dirty="0">
-                <a:solidFill>
-                  <a:srgbClr val="111848"/>
+              <a:rPr lang="en-US" sz="1000" b="1" dirty="0">
+                <a:solidFill>
+                  <a:srgbClr val="2563EB"/>
                 </a:solidFill>
                 <a:latin typeface="Arial" pitchFamily="34" charset="0"/>
                 <a:ea typeface="Arial" pitchFamily="34" charset="-122"/>
                 <a:cs typeface="Arial" pitchFamily="34" charset="-120"/>
               </a:rPr>
-              <a:t>② DAN 버전별 (v6→v11) 취약률 변화 확인</a:t>
+              <a:t>→ 자동화 도구로 수동 테스트 대비 커버리지 비교</a:t>
             </a:r>
             <a:endParaRPr lang="en-US" sz="1000" dirty="0"/>
           </a:p>
@@ -26359,14 +26575,14 @@
       </p:sp>
       <p:sp>
         <p:nvSpPr>
-          <p:cNvPr id="14" name="Text 12"/>
-          <p:cNvSpPr/>
-          <p:nvPr/>
-        </p:nvSpPr>
-        <p:spPr>
-          <a:xfrm>
-            <a:off x="411480" y="3127248"/>
-            <a:ext cx="5029200" cy="246888"/>
+          <p:cNvPr id="15" name="Text 13"/>
+          <p:cNvSpPr/>
+          <p:nvPr/>
+        </p:nvSpPr>
+        <p:spPr>
+          <a:xfrm>
+            <a:off x="5760720" y="640080"/>
+            <a:ext cx="6126480" cy="320040"/>
           </a:xfrm>
           <a:prstGeom prst="rect">
             <a:avLst/>
@@ -26382,53 +26598,14 @@
               <a:buNone/>
             </a:pPr>
             <a:r>
-              <a:rPr lang="en-US" sz="1000" b="1" dirty="0">
-                <a:solidFill>
-                  <a:srgbClr val="2563EB"/>
+              <a:rPr lang="en-US" sz="1200" b="1" dirty="0">
+                <a:solidFill>
+                  <a:srgbClr val="111848"/>
                 </a:solidFill>
                 <a:latin typeface="Arial" pitchFamily="34" charset="0"/>
                 <a:ea typeface="Arial" pitchFamily="34" charset="-122"/>
                 <a:cs typeface="Arial" pitchFamily="34" charset="-120"/>
               </a:rPr>
-              <a:t>→ 자동화 도구로 수동 테스트 대비 커버리지 비교</a:t>
-            </a:r>
-            <a:endParaRPr lang="en-US" sz="1000" dirty="0"/>
-          </a:p>
-        </p:txBody>
-      </p:sp>
-      <p:sp>
-        <p:nvSpPr>
-          <p:cNvPr id="15" name="Text 13"/>
-          <p:cNvSpPr/>
-          <p:nvPr/>
-        </p:nvSpPr>
-        <p:spPr>
-          <a:xfrm>
-            <a:off x="5760720" y="640080"/>
-            <a:ext cx="6126480" cy="320040"/>
-          </a:xfrm>
-          <a:prstGeom prst="rect">
-            <a:avLst/>
-          </a:prstGeom>
-          <a:noFill/>
-          <a:ln/>
-        </p:spPr>
-        <p:txBody>
-          <a:bodyPr wrap="square" rtlCol="0" anchor="ctr"/>
-          <a:lstStyle/>
-          <a:p>
-            <a:pPr marL="0" indent="0">
-              <a:buNone/>
-            </a:pPr>
-            <a:r>
-              <a:rPr lang="en-US" sz="1200" b="1" dirty="0">
-                <a:solidFill>
-                  <a:srgbClr val="111848"/>
-                </a:solidFill>
-                <a:latin typeface="Arial" pitchFamily="34" charset="0"/>
-                <a:ea typeface="Arial" pitchFamily="34" charset="-122"/>
-                <a:cs typeface="Arial" pitchFamily="34" charset="-120"/>
-              </a:rPr>
               <a:t>Cell 15: 실행 코드</a:t>
             </a:r>
             <a:endParaRPr lang="en-US" sz="1200" dirty="0"/>
@@ -26444,7 +26621,7 @@
         <p:spPr>
           <a:xfrm>
             <a:off x="5760720" y="1005840"/>
-            <a:ext cx="6126480" cy="5623560"/>
+            <a:ext cx="6126480" cy="4014216"/>
           </a:xfrm>
           <a:prstGeom prst="rect">
             <a:avLst/>
@@ -26465,7 +26642,7 @@
           <a:bodyPr/>
           <a:lstStyle/>
           <a:p>
-            <a:endParaRPr lang="ko-KR" altLang="en-US"/>
+            <a:endParaRPr lang="ko-KR" altLang="en-US" dirty="0"/>
           </a:p>
         </p:txBody>
       </p:sp>
@@ -26714,38 +26891,10 @@
                 <a:ea typeface="Consolas" pitchFamily="34" charset="-122"/>
                 <a:cs typeface="Consolas" pitchFamily="34" charset="-120"/>
               </a:rPr>
-              <a:t>target_report = None</a:t>
-            </a:r>
-            <a:endParaRPr lang="en-US" sz="950" dirty="0"/>
-          </a:p>
-        </p:txBody>
-      </p:sp>
-      <p:sp>
-        <p:nvSpPr>
-          <p:cNvPr id="24" name="Text 22"/>
-          <p:cNvSpPr/>
-          <p:nvPr/>
-        </p:nvSpPr>
-        <p:spPr>
-          <a:xfrm>
-            <a:off x="5897880" y="2843784"/>
-            <a:ext cx="5852160" cy="228600"/>
-          </a:xfrm>
-          <a:prstGeom prst="rect">
-            <a:avLst/>
-          </a:prstGeom>
-          <a:noFill/>
-          <a:ln/>
-        </p:spPr>
-        <p:txBody>
-          <a:bodyPr wrap="square" lIns="0" tIns="0" rIns="0" bIns="0" rtlCol="0" anchor="ctr"/>
-          <a:lstStyle/>
-          <a:p>
-            <a:pPr marL="0" indent="0">
-              <a:buNone/>
-            </a:pPr>
-            <a:r>
-              <a:rPr lang="en-US" sz="950" dirty="0">
+              <a:t>target_report = max(</a:t>
+            </a:r>
+            <a:r>
+              <a:rPr lang="en-US" sz="950" dirty="0" err="1">
                 <a:solidFill>
                   <a:srgbClr val="E6EDF3"/>
                 </a:solidFill>
@@ -26753,36 +26902,8 @@
                 <a:ea typeface="Consolas" pitchFamily="34" charset="-122"/>
                 <a:cs typeface="Consolas" pitchFamily="34" charset="-120"/>
               </a:rPr>
-              <a:t>for report_path in reversed(run_files):</a:t>
-            </a:r>
-            <a:endParaRPr lang="en-US" sz="950" dirty="0"/>
-          </a:p>
-        </p:txBody>
-      </p:sp>
-      <p:sp>
-        <p:nvSpPr>
-          <p:cNvPr id="25" name="Text 23"/>
-          <p:cNvSpPr/>
-          <p:nvPr/>
-        </p:nvSpPr>
-        <p:spPr>
-          <a:xfrm>
-            <a:off x="5897880" y="3090672"/>
-            <a:ext cx="5852160" cy="228600"/>
-          </a:xfrm>
-          <a:prstGeom prst="rect">
-            <a:avLst/>
-          </a:prstGeom>
-          <a:noFill/>
-          <a:ln/>
-        </p:spPr>
-        <p:txBody>
-          <a:bodyPr wrap="square" lIns="0" tIns="0" rIns="0" bIns="0" rtlCol="0" anchor="ctr"/>
-          <a:lstStyle/>
-          <a:p>
-            <a:pPr marL="0" indent="0">
-              <a:buNone/>
-            </a:pPr>
+              <a:t>run_files</a:t>
+            </a:r>
             <a:r>
               <a:rPr lang="en-US" sz="950" dirty="0">
                 <a:solidFill>
@@ -26792,38 +26913,10 @@
                 <a:ea typeface="Consolas" pitchFamily="34" charset="-122"/>
                 <a:cs typeface="Consolas" pitchFamily="34" charset="-120"/>
               </a:rPr>
-              <a:t>    with open(report_path) as f:</a:t>
-            </a:r>
-            <a:endParaRPr lang="en-US" sz="950" dirty="0"/>
-          </a:p>
-        </p:txBody>
-      </p:sp>
-      <p:sp>
-        <p:nvSpPr>
-          <p:cNvPr id="26" name="Text 24"/>
-          <p:cNvSpPr/>
-          <p:nvPr/>
-        </p:nvSpPr>
-        <p:spPr>
-          <a:xfrm>
-            <a:off x="5897880" y="3337560"/>
-            <a:ext cx="5852160" cy="228600"/>
-          </a:xfrm>
-          <a:prstGeom prst="rect">
-            <a:avLst/>
-          </a:prstGeom>
-          <a:noFill/>
-          <a:ln/>
-        </p:spPr>
-        <p:txBody>
-          <a:bodyPr wrap="square" lIns="0" tIns="0" rIns="0" bIns="0" rtlCol="0" anchor="ctr"/>
-          <a:lstStyle/>
-          <a:p>
-            <a:pPr marL="0" indent="0">
-              <a:buNone/>
-            </a:pPr>
-            <a:r>
-              <a:rPr lang="en-US" sz="950" dirty="0">
+              <a:t>, key=</a:t>
+            </a:r>
+            <a:r>
+              <a:rPr lang="en-US" sz="950" dirty="0" err="1">
                 <a:solidFill>
                   <a:srgbClr val="E6EDF3"/>
                 </a:solidFill>
@@ -26831,36 +26924,8 @@
                 <a:ea typeface="Consolas" pitchFamily="34" charset="-122"/>
                 <a:cs typeface="Consolas" pitchFamily="34" charset="-120"/>
               </a:rPr>
-              <a:t>        if '"entry_type": "eval"' in f.read():</a:t>
-            </a:r>
-            <a:endParaRPr lang="en-US" sz="950" dirty="0"/>
-          </a:p>
-        </p:txBody>
-      </p:sp>
-      <p:sp>
-        <p:nvSpPr>
-          <p:cNvPr id="27" name="Text 25"/>
-          <p:cNvSpPr/>
-          <p:nvPr/>
-        </p:nvSpPr>
-        <p:spPr>
-          <a:xfrm>
-            <a:off x="5897880" y="3584448"/>
-            <a:ext cx="5852160" cy="228600"/>
-          </a:xfrm>
-          <a:prstGeom prst="rect">
-            <a:avLst/>
-          </a:prstGeom>
-          <a:noFill/>
-          <a:ln/>
-        </p:spPr>
-        <p:txBody>
-          <a:bodyPr wrap="square" lIns="0" tIns="0" rIns="0" bIns="0" rtlCol="0" anchor="ctr"/>
-          <a:lstStyle/>
-          <a:p>
-            <a:pPr marL="0" indent="0">
-              <a:buNone/>
-            </a:pPr>
+              <a:t>os.path.getmtime</a:t>
+            </a:r>
             <a:r>
               <a:rPr lang="en-US" sz="950" dirty="0">
                 <a:solidFill>
@@ -26870,7 +26935,7 @@
                 <a:ea typeface="Consolas" pitchFamily="34" charset="-122"/>
                 <a:cs typeface="Consolas" pitchFamily="34" charset="-120"/>
               </a:rPr>
-              <a:t>            target_report = report_path</a:t>
+              <a:t>)</a:t>
             </a:r>
             <a:endParaRPr lang="en-US" sz="950" dirty="0"/>
           </a:p>
@@ -26878,13 +26943,13 @@
       </p:sp>
       <p:sp>
         <p:nvSpPr>
-          <p:cNvPr id="28" name="Text 26"/>
-          <p:cNvSpPr/>
-          <p:nvPr/>
-        </p:nvSpPr>
-        <p:spPr>
-          <a:xfrm>
-            <a:off x="5897880" y="3831336"/>
+          <p:cNvPr id="24" name="Text 22"/>
+          <p:cNvSpPr/>
+          <p:nvPr/>
+        </p:nvSpPr>
+        <p:spPr>
+          <a:xfrm>
+            <a:off x="5897880" y="2843784"/>
             <a:ext cx="5852160" cy="228600"/>
           </a:xfrm>
           <a:prstGeom prst="rect">
@@ -26909,77 +26974,21 @@
                 <a:ea typeface="Consolas" pitchFamily="34" charset="-122"/>
                 <a:cs typeface="Consolas" pitchFamily="34" charset="-120"/>
               </a:rPr>
-              <a:t>            break</a:t>
-            </a:r>
-            <a:endParaRPr lang="en-US" sz="950" dirty="0"/>
-          </a:p>
-        </p:txBody>
-      </p:sp>
-      <p:sp>
-        <p:nvSpPr>
-          <p:cNvPr id="29" name="Text 27"/>
-          <p:cNvSpPr/>
-          <p:nvPr/>
-        </p:nvSpPr>
-        <p:spPr>
-          <a:xfrm>
-            <a:off x="5897880" y="4078224"/>
-            <a:ext cx="5852160" cy="228600"/>
-          </a:xfrm>
-          <a:prstGeom prst="rect">
-            <a:avLst/>
-          </a:prstGeom>
-          <a:noFill/>
-          <a:ln/>
-        </p:spPr>
-        <p:txBody>
-          <a:bodyPr wrap="square" lIns="0" tIns="0" rIns="0" bIns="0" rtlCol="0" anchor="ctr"/>
-          <a:lstStyle/>
-          <a:p>
-            <a:pPr marL="0" indent="0">
-              <a:buNone/>
-            </a:pPr>
-            <a:r>
-              <a:rPr lang="en-US" sz="950" dirty="0">
-                <a:solidFill>
-                  <a:srgbClr val="8B949E"/>
+              <a:t>print(f"{'</a:t>
+            </a:r>
+            <a:r>
+              <a:rPr lang="ko-KR" altLang="en-US" sz="950" dirty="0">
+                <a:solidFill>
+                  <a:srgbClr val="E6EDF3"/>
                 </a:solidFill>
                 <a:latin typeface="Consolas" pitchFamily="34" charset="0"/>
                 <a:ea typeface="Consolas" pitchFamily="34" charset="-122"/>
                 <a:cs typeface="Consolas" pitchFamily="34" charset="-120"/>
               </a:rPr>
-              <a:t># eval 엔트리 파싱</a:t>
-            </a:r>
-            <a:endParaRPr lang="en-US" sz="950" dirty="0"/>
-          </a:p>
-        </p:txBody>
-      </p:sp>
-      <p:sp>
-        <p:nvSpPr>
-          <p:cNvPr id="30" name="Text 28"/>
-          <p:cNvSpPr/>
-          <p:nvPr/>
-        </p:nvSpPr>
-        <p:spPr>
-          <a:xfrm>
-            <a:off x="5897880" y="4325112"/>
-            <a:ext cx="5852160" cy="228600"/>
-          </a:xfrm>
-          <a:prstGeom prst="rect">
-            <a:avLst/>
-          </a:prstGeom>
-          <a:noFill/>
-          <a:ln/>
-        </p:spPr>
-        <p:txBody>
-          <a:bodyPr wrap="square" lIns="0" tIns="0" rIns="0" bIns="0" rtlCol="0" anchor="ctr"/>
-          <a:lstStyle/>
-          <a:p>
-            <a:pPr marL="0" indent="0">
-              <a:buNone/>
-            </a:pPr>
-            <a:r>
-              <a:rPr lang="en-US" sz="950" dirty="0">
+              <a:t>공격 유형</a:t>
+            </a:r>
+            <a:r>
+              <a:rPr lang="en-US" altLang="ko-KR" sz="950" dirty="0">
                 <a:solidFill>
                   <a:srgbClr val="E6EDF3"/>
                 </a:solidFill>
@@ -26987,36 +26996,8 @@
                 <a:ea typeface="Consolas" pitchFamily="34" charset="-122"/>
                 <a:cs typeface="Consolas" pitchFamily="34" charset="-120"/>
               </a:rPr>
-              <a:t>evals = []</a:t>
-            </a:r>
-            <a:endParaRPr lang="en-US" sz="950" dirty="0"/>
-          </a:p>
-        </p:txBody>
-      </p:sp>
-      <p:sp>
-        <p:nvSpPr>
-          <p:cNvPr id="31" name="Text 29"/>
-          <p:cNvSpPr/>
-          <p:nvPr/>
-        </p:nvSpPr>
-        <p:spPr>
-          <a:xfrm>
-            <a:off x="5897880" y="4572000"/>
-            <a:ext cx="5852160" cy="228600"/>
-          </a:xfrm>
-          <a:prstGeom prst="rect">
-            <a:avLst/>
-          </a:prstGeom>
-          <a:noFill/>
-          <a:ln/>
-        </p:spPr>
-        <p:txBody>
-          <a:bodyPr wrap="square" lIns="0" tIns="0" rIns="0" bIns="0" rtlCol="0" anchor="ctr"/>
-          <a:lstStyle/>
-          <a:p>
-            <a:pPr marL="0" indent="0">
-              <a:buNone/>
-            </a:pPr>
+              <a:t>(</a:t>
+            </a:r>
             <a:r>
               <a:rPr lang="en-US" sz="950" dirty="0">
                 <a:solidFill>
@@ -27026,38 +27007,10 @@
                 <a:ea typeface="Consolas" pitchFamily="34" charset="-122"/>
                 <a:cs typeface="Consolas" pitchFamily="34" charset="-120"/>
               </a:rPr>
-              <a:t>with open(target_report) as f:</a:t>
-            </a:r>
-            <a:endParaRPr lang="en-US" sz="950" dirty="0"/>
-          </a:p>
-        </p:txBody>
-      </p:sp>
-      <p:sp>
-        <p:nvSpPr>
-          <p:cNvPr id="32" name="Text 30"/>
-          <p:cNvSpPr/>
-          <p:nvPr/>
-        </p:nvSpPr>
-        <p:spPr>
-          <a:xfrm>
-            <a:off x="5897880" y="4818888"/>
-            <a:ext cx="5852160" cy="228600"/>
-          </a:xfrm>
-          <a:prstGeom prst="rect">
-            <a:avLst/>
-          </a:prstGeom>
-          <a:noFill/>
-          <a:ln/>
-        </p:spPr>
-        <p:txBody>
-          <a:bodyPr wrap="square" lIns="0" tIns="0" rIns="0" bIns="0" rtlCol="0" anchor="ctr"/>
-          <a:lstStyle/>
-          <a:p>
-            <a:pPr marL="0" indent="0">
-              <a:buNone/>
-            </a:pPr>
-            <a:r>
-              <a:rPr lang="en-US" sz="950" dirty="0">
+              <a:t>Probe)':&lt;30} | {'</a:t>
+            </a:r>
+            <a:r>
+              <a:rPr lang="ko-KR" altLang="en-US" sz="950" dirty="0">
                 <a:solidFill>
                   <a:srgbClr val="E6EDF3"/>
                 </a:solidFill>
@@ -27065,38 +27018,10 @@
                 <a:ea typeface="Consolas" pitchFamily="34" charset="-122"/>
                 <a:cs typeface="Consolas" pitchFamily="34" charset="-120"/>
               </a:rPr>
-              <a:t>    for line in f:</a:t>
-            </a:r>
-            <a:endParaRPr lang="en-US" sz="950" dirty="0"/>
-          </a:p>
-        </p:txBody>
-      </p:sp>
-      <p:sp>
-        <p:nvSpPr>
-          <p:cNvPr id="33" name="Text 31"/>
-          <p:cNvSpPr/>
-          <p:nvPr/>
-        </p:nvSpPr>
-        <p:spPr>
-          <a:xfrm>
-            <a:off x="5897880" y="5065776"/>
-            <a:ext cx="5852160" cy="228600"/>
-          </a:xfrm>
-          <a:prstGeom prst="rect">
-            <a:avLst/>
-          </a:prstGeom>
-          <a:noFill/>
-          <a:ln/>
-        </p:spPr>
-        <p:txBody>
-          <a:bodyPr wrap="square" lIns="0" tIns="0" rIns="0" bIns="0" rtlCol="0" anchor="ctr"/>
-          <a:lstStyle/>
-          <a:p>
-            <a:pPr marL="0" indent="0">
-              <a:buNone/>
-            </a:pPr>
-            <a:r>
-              <a:rPr lang="en-US" sz="950" dirty="0">
+              <a:t>검사기</a:t>
+            </a:r>
+            <a:r>
+              <a:rPr lang="en-US" altLang="ko-KR" sz="950" dirty="0">
                 <a:solidFill>
                   <a:srgbClr val="E6EDF3"/>
                 </a:solidFill>
@@ -27104,36 +27029,8 @@
                 <a:ea typeface="Consolas" pitchFamily="34" charset="-122"/>
                 <a:cs typeface="Consolas" pitchFamily="34" charset="-120"/>
               </a:rPr>
-              <a:t>        e = json.loads(line)</a:t>
-            </a:r>
-            <a:endParaRPr lang="en-US" sz="950" dirty="0"/>
-          </a:p>
-        </p:txBody>
-      </p:sp>
-      <p:sp>
-        <p:nvSpPr>
-          <p:cNvPr id="34" name="Text 32"/>
-          <p:cNvSpPr/>
-          <p:nvPr/>
-        </p:nvSpPr>
-        <p:spPr>
-          <a:xfrm>
-            <a:off x="5897880" y="5312664"/>
-            <a:ext cx="5852160" cy="228600"/>
-          </a:xfrm>
-          <a:prstGeom prst="rect">
-            <a:avLst/>
-          </a:prstGeom>
-          <a:noFill/>
-          <a:ln/>
-        </p:spPr>
-        <p:txBody>
-          <a:bodyPr wrap="square" lIns="0" tIns="0" rIns="0" bIns="0" rtlCol="0" anchor="ctr"/>
-          <a:lstStyle/>
-          <a:p>
-            <a:pPr marL="0" indent="0">
-              <a:buNone/>
-            </a:pPr>
+              <a:t>(</a:t>
+            </a:r>
             <a:r>
               <a:rPr lang="en-US" sz="950" dirty="0">
                 <a:solidFill>
@@ -27143,38 +27040,10 @@
                 <a:ea typeface="Consolas" pitchFamily="34" charset="-122"/>
                 <a:cs typeface="Consolas" pitchFamily="34" charset="-120"/>
               </a:rPr>
-              <a:t>        if e.get('entry_type')=='eval':</a:t>
-            </a:r>
-            <a:endParaRPr lang="en-US" sz="950" dirty="0"/>
-          </a:p>
-        </p:txBody>
-      </p:sp>
-      <p:sp>
-        <p:nvSpPr>
-          <p:cNvPr id="35" name="Text 33"/>
-          <p:cNvSpPr/>
-          <p:nvPr/>
-        </p:nvSpPr>
-        <p:spPr>
-          <a:xfrm>
-            <a:off x="5897880" y="5559552"/>
-            <a:ext cx="5852160" cy="228600"/>
-          </a:xfrm>
-          <a:prstGeom prst="rect">
-            <a:avLst/>
-          </a:prstGeom>
-          <a:noFill/>
-          <a:ln/>
-        </p:spPr>
-        <p:txBody>
-          <a:bodyPr wrap="square" lIns="0" tIns="0" rIns="0" bIns="0" rtlCol="0" anchor="ctr"/>
-          <a:lstStyle/>
-          <a:p>
-            <a:pPr marL="0" indent="0">
-              <a:buNone/>
-            </a:pPr>
-            <a:r>
-              <a:rPr lang="en-US" sz="950" dirty="0">
+              <a:t>Detector)':&lt;40} | {'</a:t>
+            </a:r>
+            <a:r>
+              <a:rPr lang="ko-KR" altLang="en-US" sz="950" dirty="0">
                 <a:solidFill>
                   <a:srgbClr val="E6EDF3"/>
                 </a:solidFill>
@@ -27182,38 +27051,10 @@
                 <a:ea typeface="Consolas" pitchFamily="34" charset="-122"/>
                 <a:cs typeface="Consolas" pitchFamily="34" charset="-120"/>
               </a:rPr>
-              <a:t>            evals.append(e)</a:t>
-            </a:r>
-            <a:endParaRPr lang="en-US" sz="950" dirty="0"/>
-          </a:p>
-        </p:txBody>
-      </p:sp>
-      <p:sp>
-        <p:nvSpPr>
-          <p:cNvPr id="36" name="Text 34"/>
-          <p:cNvSpPr/>
-          <p:nvPr/>
-        </p:nvSpPr>
-        <p:spPr>
-          <a:xfrm>
-            <a:off x="5897880" y="5806440"/>
-            <a:ext cx="5852160" cy="228600"/>
-          </a:xfrm>
-          <a:prstGeom prst="rect">
-            <a:avLst/>
-          </a:prstGeom>
-          <a:noFill/>
-          <a:ln/>
-        </p:spPr>
-        <p:txBody>
-          <a:bodyPr wrap="square" lIns="0" tIns="0" rIns="0" bIns="0" rtlCol="0" anchor="ctr"/>
-          <a:lstStyle/>
-          <a:p>
-            <a:pPr marL="0" indent="0">
-              <a:buNone/>
-            </a:pPr>
-            <a:r>
-              <a:rPr lang="en-US" sz="950" dirty="0">
+              <a:t>결과</a:t>
+            </a:r>
+            <a:r>
+              <a:rPr lang="en-US" altLang="ko-KR" sz="950" dirty="0">
                 <a:solidFill>
                   <a:srgbClr val="E6EDF3"/>
                 </a:solidFill>
@@ -27221,21 +27062,20 @@
                 <a:ea typeface="Consolas" pitchFamily="34" charset="-122"/>
                 <a:cs typeface="Consolas" pitchFamily="34" charset="-120"/>
               </a:rPr>
-              <a:t>for e in evals:</a:t>
-            </a:r>
-            <a:endParaRPr lang="en-US" sz="950" dirty="0"/>
-          </a:p>
-        </p:txBody>
-      </p:sp>
-      <p:sp>
-        <p:nvSpPr>
-          <p:cNvPr id="37" name="Text 35"/>
-          <p:cNvSpPr/>
-          <p:nvPr/>
-        </p:nvSpPr>
-        <p:spPr>
-          <a:xfrm>
-            <a:off x="5897880" y="6053328"/>
+              <a:t>'}")</a:t>
+            </a:r>
+          </a:p>
+        </p:txBody>
+      </p:sp>
+      <p:sp>
+        <p:nvSpPr>
+          <p:cNvPr id="29" name="Text 27"/>
+          <p:cNvSpPr/>
+          <p:nvPr/>
+        </p:nvSpPr>
+        <p:spPr>
+          <a:xfrm>
+            <a:off x="5897880" y="3306682"/>
             <a:ext cx="5852160" cy="228600"/>
           </a:xfrm>
           <a:prstGeom prst="rect">
@@ -27254,54 +27094,404 @@
             <a:r>
               <a:rPr lang="en-US" sz="950" dirty="0">
                 <a:solidFill>
-                  <a:srgbClr val="E6EDF3"/>
+                  <a:srgbClr val="8B949E"/>
                 </a:solidFill>
                 <a:latin typeface="Consolas" pitchFamily="34" charset="0"/>
                 <a:ea typeface="Consolas" pitchFamily="34" charset="-122"/>
                 <a:cs typeface="Consolas" pitchFamily="34" charset="-120"/>
               </a:rPr>
-              <a:t>    status='FAIL' if e['fails']&gt;0 else 'PASS'</a:t>
-            </a:r>
-            <a:endParaRPr lang="en-US" sz="950" dirty="0"/>
-          </a:p>
-        </p:txBody>
-      </p:sp>
-      <p:sp>
-        <p:nvSpPr>
-          <p:cNvPr id="38" name="Text 36"/>
-          <p:cNvSpPr/>
-          <p:nvPr/>
-        </p:nvSpPr>
-        <p:spPr>
-          <a:xfrm>
-            <a:off x="5897880" y="6300216"/>
-            <a:ext cx="5852160" cy="228600"/>
-          </a:xfrm>
-          <a:prstGeom prst="rect">
-            <a:avLst/>
-          </a:prstGeom>
-          <a:noFill/>
-          <a:ln/>
-        </p:spPr>
-        <p:txBody>
-          <a:bodyPr wrap="square" lIns="0" tIns="0" rIns="0" bIns="0" rtlCol="0" anchor="ctr"/>
-          <a:lstStyle/>
-          <a:p>
-            <a:pPr marL="0" indent="0">
-              <a:buNone/>
-            </a:pPr>
-            <a:r>
-              <a:rPr lang="en-US" sz="950" dirty="0">
-                <a:solidFill>
-                  <a:srgbClr val="10B981"/>
+              <a:t># </a:t>
+            </a:r>
+            <a:r>
+              <a:rPr lang="ko-KR" altLang="en-US" sz="950" dirty="0">
+                <a:solidFill>
+                  <a:srgbClr val="8B949E"/>
                 </a:solidFill>
                 <a:latin typeface="Consolas" pitchFamily="34" charset="0"/>
                 <a:ea typeface="Consolas" pitchFamily="34" charset="-122"/>
                 <a:cs typeface="Consolas" pitchFamily="34" charset="-120"/>
               </a:rPr>
-              <a:t>    print(f"{e['probe']:&lt;35} {status}")</a:t>
+              <a:t>선택된 단일파일의 </a:t>
+            </a:r>
+            <a:r>
+              <a:rPr lang="en-US" altLang="ko-KR" sz="950" dirty="0">
+                <a:solidFill>
+                  <a:srgbClr val="8B949E"/>
+                </a:solidFill>
+                <a:latin typeface="Consolas" pitchFamily="34" charset="0"/>
+                <a:ea typeface="Consolas" pitchFamily="34" charset="-122"/>
+                <a:cs typeface="Consolas" pitchFamily="34" charset="-120"/>
+              </a:rPr>
+              <a:t>‘eval’ </a:t>
+            </a:r>
+            <a:r>
+              <a:rPr lang="ko-KR" altLang="en-US" sz="950" dirty="0">
+                <a:solidFill>
+                  <a:srgbClr val="8B949E"/>
+                </a:solidFill>
+                <a:latin typeface="Consolas" pitchFamily="34" charset="0"/>
+                <a:ea typeface="Consolas" pitchFamily="34" charset="-122"/>
+                <a:cs typeface="Consolas" pitchFamily="34" charset="-120"/>
+              </a:rPr>
+              <a:t>엔트리만 </a:t>
+            </a:r>
+            <a:r>
+              <a:rPr lang="ko-KR" altLang="en-US" sz="950" dirty="0" err="1">
+                <a:solidFill>
+                  <a:srgbClr val="8B949E"/>
+                </a:solidFill>
+                <a:latin typeface="Consolas" pitchFamily="34" charset="0"/>
+                <a:ea typeface="Consolas" pitchFamily="34" charset="-122"/>
+                <a:cs typeface="Consolas" pitchFamily="34" charset="-120"/>
+              </a:rPr>
+              <a:t>파싱하여</a:t>
+            </a:r>
+            <a:r>
+              <a:rPr lang="ko-KR" altLang="en-US" sz="950" dirty="0">
+                <a:solidFill>
+                  <a:srgbClr val="8B949E"/>
+                </a:solidFill>
+                <a:latin typeface="Consolas" pitchFamily="34" charset="0"/>
+                <a:ea typeface="Consolas" pitchFamily="34" charset="-122"/>
+                <a:cs typeface="Consolas" pitchFamily="34" charset="-120"/>
+              </a:rPr>
+              <a:t> 출력</a:t>
             </a:r>
             <a:endParaRPr lang="en-US" sz="950" dirty="0"/>
+          </a:p>
+        </p:txBody>
+      </p:sp>
+      <p:sp>
+        <p:nvSpPr>
+          <p:cNvPr id="30" name="Text 28"/>
+          <p:cNvSpPr/>
+          <p:nvPr/>
+        </p:nvSpPr>
+        <p:spPr>
+          <a:xfrm>
+            <a:off x="5897880" y="3553569"/>
+            <a:ext cx="5852160" cy="1879821"/>
+          </a:xfrm>
+          <a:prstGeom prst="rect">
+            <a:avLst/>
+          </a:prstGeom>
+          <a:noFill/>
+          <a:ln/>
+        </p:spPr>
+        <p:txBody>
+          <a:bodyPr wrap="square" lIns="0" tIns="0" rIns="0" bIns="0" rtlCol="0" anchor="t"/>
+          <a:lstStyle/>
+          <a:p>
+            <a:pPr marL="0" indent="0">
+              <a:buNone/>
+            </a:pPr>
+            <a:r>
+              <a:rPr lang="es-419" altLang="ko-KR" sz="950" dirty="0">
+                <a:solidFill>
+                  <a:srgbClr val="E6EDF3"/>
+                </a:solidFill>
+                <a:latin typeface="Consolas" pitchFamily="34" charset="0"/>
+                <a:ea typeface="Consolas" pitchFamily="34" charset="-122"/>
+                <a:cs typeface="Consolas" pitchFamily="34" charset="-120"/>
+              </a:rPr>
+              <a:t>with open(target_report, 'r') as f:</a:t>
+            </a:r>
+          </a:p>
+          <a:p>
+            <a:pPr marL="0" indent="0">
+              <a:buNone/>
+            </a:pPr>
+            <a:r>
+              <a:rPr lang="ko-KR" altLang="en-US" sz="950" dirty="0">
+                <a:solidFill>
+                  <a:srgbClr val="E6EDF3"/>
+                </a:solidFill>
+                <a:latin typeface="Consolas" pitchFamily="34" charset="0"/>
+                <a:ea typeface="Consolas" pitchFamily="34" charset="-122"/>
+                <a:cs typeface="Consolas" pitchFamily="34" charset="-120"/>
+              </a:rPr>
+              <a:t>    </a:t>
+            </a:r>
+            <a:r>
+              <a:rPr lang="es-419" altLang="ko-KR" sz="950" dirty="0">
+                <a:solidFill>
+                  <a:srgbClr val="E6EDF3"/>
+                </a:solidFill>
+                <a:latin typeface="Consolas" pitchFamily="34" charset="0"/>
+                <a:ea typeface="Consolas" pitchFamily="34" charset="-122"/>
+                <a:cs typeface="Consolas" pitchFamily="34" charset="-120"/>
+              </a:rPr>
+              <a:t>for line in f:</a:t>
+            </a:r>
+          </a:p>
+          <a:p>
+            <a:pPr marL="0" indent="0">
+              <a:buNone/>
+            </a:pPr>
+            <a:r>
+              <a:rPr lang="ko-KR" altLang="en-US" sz="950" dirty="0">
+                <a:solidFill>
+                  <a:srgbClr val="E6EDF3"/>
+                </a:solidFill>
+                <a:latin typeface="Consolas" pitchFamily="34" charset="0"/>
+                <a:ea typeface="Consolas" pitchFamily="34" charset="-122"/>
+                <a:cs typeface="Consolas" pitchFamily="34" charset="-120"/>
+              </a:rPr>
+              <a:t>        </a:t>
+            </a:r>
+            <a:r>
+              <a:rPr lang="es-419" altLang="ko-KR" sz="950" dirty="0">
+                <a:solidFill>
+                  <a:srgbClr val="E6EDF3"/>
+                </a:solidFill>
+                <a:latin typeface="Consolas" pitchFamily="34" charset="0"/>
+                <a:ea typeface="Consolas" pitchFamily="34" charset="-122"/>
+                <a:cs typeface="Consolas" pitchFamily="34" charset="-120"/>
+              </a:rPr>
+              <a:t>data = json.loads(line)</a:t>
+            </a:r>
+          </a:p>
+          <a:p>
+            <a:pPr marL="0" indent="0">
+              <a:buNone/>
+            </a:pPr>
+            <a:r>
+              <a:rPr lang="ko-KR" altLang="en-US" sz="950" dirty="0">
+                <a:solidFill>
+                  <a:srgbClr val="E6EDF3"/>
+                </a:solidFill>
+                <a:latin typeface="Consolas" pitchFamily="34" charset="0"/>
+                <a:ea typeface="Consolas" pitchFamily="34" charset="-122"/>
+                <a:cs typeface="Consolas" pitchFamily="34" charset="-120"/>
+              </a:rPr>
+              <a:t>        </a:t>
+            </a:r>
+            <a:r>
+              <a:rPr lang="es-419" altLang="ko-KR" sz="950" dirty="0">
+                <a:solidFill>
+                  <a:srgbClr val="E6EDF3"/>
+                </a:solidFill>
+                <a:latin typeface="Consolas" pitchFamily="34" charset="0"/>
+                <a:ea typeface="Consolas" pitchFamily="34" charset="-122"/>
+                <a:cs typeface="Consolas" pitchFamily="34" charset="-120"/>
+              </a:rPr>
+              <a:t>if</a:t>
+            </a:r>
+            <a:r>
+              <a:rPr lang="en-US" altLang="ko-KR" sz="950" dirty="0">
+                <a:solidFill>
+                  <a:srgbClr val="E6EDF3"/>
+                </a:solidFill>
+                <a:latin typeface="Consolas" pitchFamily="34" charset="0"/>
+                <a:ea typeface="Consolas" pitchFamily="34" charset="-122"/>
+                <a:cs typeface="Consolas" pitchFamily="34" charset="-120"/>
+              </a:rPr>
+              <a:t> </a:t>
+            </a:r>
+            <a:r>
+              <a:rPr lang="es-419" altLang="ko-KR" sz="950" dirty="0">
+                <a:solidFill>
+                  <a:srgbClr val="E6EDF3"/>
+                </a:solidFill>
+                <a:latin typeface="Consolas" pitchFamily="34" charset="0"/>
+                <a:ea typeface="Consolas" pitchFamily="34" charset="-122"/>
+                <a:cs typeface="Consolas" pitchFamily="34" charset="-120"/>
+              </a:rPr>
+              <a:t>data.get('entry_type') == 'eval＇:</a:t>
+            </a:r>
+          </a:p>
+          <a:p>
+            <a:pPr marL="0" indent="0">
+              <a:buNone/>
+            </a:pPr>
+            <a:r>
+              <a:rPr lang="ko-KR" altLang="en-US" sz="950" dirty="0">
+                <a:solidFill>
+                  <a:srgbClr val="E6EDF3"/>
+                </a:solidFill>
+                <a:latin typeface="Consolas" pitchFamily="34" charset="0"/>
+                <a:ea typeface="Consolas" pitchFamily="34" charset="-122"/>
+                <a:cs typeface="Consolas" pitchFamily="34" charset="-120"/>
+              </a:rPr>
+              <a:t>            </a:t>
+            </a:r>
+            <a:r>
+              <a:rPr lang="es-419" altLang="ko-KR" sz="950" dirty="0">
+                <a:solidFill>
+                  <a:srgbClr val="E6EDF3"/>
+                </a:solidFill>
+                <a:latin typeface="Consolas" pitchFamily="34" charset="0"/>
+                <a:ea typeface="Consolas" pitchFamily="34" charset="-122"/>
+                <a:cs typeface="Consolas" pitchFamily="34" charset="-120"/>
+              </a:rPr>
+              <a:t>status</a:t>
+            </a:r>
+            <a:r>
+              <a:rPr lang="en-US" altLang="ko-KR" sz="950" dirty="0">
+                <a:solidFill>
+                  <a:srgbClr val="E6EDF3"/>
+                </a:solidFill>
+                <a:latin typeface="Consolas" pitchFamily="34" charset="0"/>
+                <a:ea typeface="Consolas" pitchFamily="34" charset="-122"/>
+                <a:cs typeface="Consolas" pitchFamily="34" charset="-120"/>
+              </a:rPr>
+              <a:t> </a:t>
+            </a:r>
+            <a:r>
+              <a:rPr lang="es-419" altLang="ko-KR" sz="950" dirty="0">
+                <a:solidFill>
+                  <a:srgbClr val="E6EDF3"/>
+                </a:solidFill>
+                <a:latin typeface="Consolas" pitchFamily="34" charset="0"/>
+                <a:ea typeface="Consolas" pitchFamily="34" charset="-122"/>
+                <a:cs typeface="Consolas" pitchFamily="34" charset="-120"/>
+              </a:rPr>
+              <a:t>= '</a:t>
+            </a:r>
+            <a:r>
+              <a:rPr lang="ko-KR" altLang="en-US" sz="950" dirty="0">
+                <a:solidFill>
+                  <a:srgbClr val="E6EDF3"/>
+                </a:solidFill>
+                <a:latin typeface="Consolas" pitchFamily="34" charset="0"/>
+                <a:ea typeface="Consolas" pitchFamily="34" charset="-122"/>
+                <a:cs typeface="Consolas" pitchFamily="34" charset="-120"/>
+              </a:rPr>
+              <a:t>❌ </a:t>
+            </a:r>
+            <a:r>
+              <a:rPr lang="es-419" altLang="ko-KR" sz="950" dirty="0">
+                <a:solidFill>
+                  <a:srgbClr val="E6EDF3"/>
+                </a:solidFill>
+                <a:latin typeface="Consolas" pitchFamily="34" charset="0"/>
+                <a:ea typeface="Consolas" pitchFamily="34" charset="-122"/>
+                <a:cs typeface="Consolas" pitchFamily="34" charset="-120"/>
+              </a:rPr>
+              <a:t>FAIL' if data['fails'] &gt; 0 else '</a:t>
+            </a:r>
+            <a:r>
+              <a:rPr lang="ko-KR" altLang="en-US" sz="950" dirty="0">
+                <a:solidFill>
+                  <a:srgbClr val="E6EDF3"/>
+                </a:solidFill>
+                <a:latin typeface="Consolas" pitchFamily="34" charset="0"/>
+                <a:ea typeface="Consolas" pitchFamily="34" charset="-122"/>
+                <a:cs typeface="Consolas" pitchFamily="34" charset="-120"/>
+              </a:rPr>
+              <a:t>✅ </a:t>
+            </a:r>
+            <a:r>
+              <a:rPr lang="es-419" altLang="ko-KR" sz="950" dirty="0">
+                <a:solidFill>
+                  <a:srgbClr val="E6EDF3"/>
+                </a:solidFill>
+                <a:latin typeface="Consolas" pitchFamily="34" charset="0"/>
+                <a:ea typeface="Consolas" pitchFamily="34" charset="-122"/>
+                <a:cs typeface="Consolas" pitchFamily="34" charset="-120"/>
+              </a:rPr>
+              <a:t>PASS＇</a:t>
+            </a:r>
+          </a:p>
+          <a:p>
+            <a:pPr marL="0" indent="0">
+              <a:buNone/>
+            </a:pPr>
+            <a:r>
+              <a:rPr lang="ko-KR" altLang="en-US" sz="950" dirty="0">
+                <a:solidFill>
+                  <a:srgbClr val="E6EDF3"/>
+                </a:solidFill>
+                <a:latin typeface="Consolas" pitchFamily="34" charset="0"/>
+                <a:ea typeface="Consolas" pitchFamily="34" charset="-122"/>
+                <a:cs typeface="Consolas" pitchFamily="34" charset="-120"/>
+              </a:rPr>
+              <a:t>            </a:t>
+            </a:r>
+            <a:r>
+              <a:rPr lang="es-419" altLang="ko-KR" sz="950" dirty="0">
+                <a:solidFill>
+                  <a:srgbClr val="E6EDF3"/>
+                </a:solidFill>
+                <a:latin typeface="Consolas" pitchFamily="34" charset="0"/>
+                <a:ea typeface="Consolas" pitchFamily="34" charset="-122"/>
+                <a:cs typeface="Consolas" pitchFamily="34" charset="-120"/>
+              </a:rPr>
+              <a:t>probe = data['probe＇]</a:t>
+            </a:r>
+            <a:r>
+              <a:rPr lang="ko-KR" altLang="en-US" sz="950" dirty="0">
+                <a:solidFill>
+                  <a:srgbClr val="E6EDF3"/>
+                </a:solidFill>
+                <a:latin typeface="Consolas" pitchFamily="34" charset="0"/>
+                <a:ea typeface="Consolas" pitchFamily="34" charset="-122"/>
+                <a:cs typeface="Consolas" pitchFamily="34" charset="-120"/>
+              </a:rPr>
+              <a:t>   </a:t>
+            </a:r>
+            <a:endParaRPr lang="es-419" altLang="ko-KR" sz="950" dirty="0">
+              <a:solidFill>
+                <a:srgbClr val="E6EDF3"/>
+              </a:solidFill>
+              <a:latin typeface="Consolas" pitchFamily="34" charset="0"/>
+              <a:ea typeface="Consolas" pitchFamily="34" charset="-122"/>
+              <a:cs typeface="Consolas" pitchFamily="34" charset="-120"/>
+            </a:endParaRPr>
+          </a:p>
+          <a:p>
+            <a:pPr marL="0" indent="0">
+              <a:buNone/>
+            </a:pPr>
+            <a:r>
+              <a:rPr lang="ko-KR" altLang="en-US" sz="950" dirty="0">
+                <a:solidFill>
+                  <a:srgbClr val="E6EDF3"/>
+                </a:solidFill>
+                <a:latin typeface="Consolas" pitchFamily="34" charset="0"/>
+                <a:ea typeface="Consolas" pitchFamily="34" charset="-122"/>
+                <a:cs typeface="Consolas" pitchFamily="34" charset="-120"/>
+              </a:rPr>
+              <a:t>           </a:t>
+            </a:r>
+            <a:r>
+              <a:rPr lang="en-US" altLang="ko-KR" sz="950" dirty="0">
+                <a:solidFill>
+                  <a:srgbClr val="E6EDF3"/>
+                </a:solidFill>
+                <a:latin typeface="Consolas" pitchFamily="34" charset="0"/>
+                <a:ea typeface="Consolas" pitchFamily="34" charset="-122"/>
+                <a:cs typeface="Consolas" pitchFamily="34" charset="-120"/>
+              </a:rPr>
+              <a:t> d</a:t>
+            </a:r>
+            <a:r>
+              <a:rPr lang="es-419" altLang="ko-KR" sz="950" dirty="0">
+                <a:solidFill>
+                  <a:srgbClr val="E6EDF3"/>
+                </a:solidFill>
+                <a:latin typeface="Consolas" pitchFamily="34" charset="0"/>
+                <a:ea typeface="Consolas" pitchFamily="34" charset="-122"/>
+                <a:cs typeface="Consolas" pitchFamily="34" charset="-120"/>
+              </a:rPr>
+              <a:t>etector = data['detector’]</a:t>
+            </a:r>
+          </a:p>
+          <a:p>
+            <a:pPr marL="0" indent="0">
+              <a:buNone/>
+            </a:pPr>
+            <a:r>
+              <a:rPr lang="es-419" altLang="ko-KR" sz="950" dirty="0">
+                <a:solidFill>
+                  <a:srgbClr val="E6EDF3"/>
+                </a:solidFill>
+                <a:latin typeface="Consolas" pitchFamily="34" charset="0"/>
+                <a:ea typeface="Consolas" pitchFamily="34" charset="-122"/>
+                <a:cs typeface="Consolas" pitchFamily="34" charset="-120"/>
+              </a:rPr>
+              <a:t>            print(f"{probe:&lt;30} | {detector:&lt;40} | {status}")</a:t>
+            </a:r>
           </a:p>
         </p:txBody>
       </p:sp>

--- a/3일차_실습3_latest.pptx
+++ b/3일차_실습3_latest.pptx
@@ -27346,51 +27346,7 @@
                 <a:ea typeface="Consolas" pitchFamily="34" charset="-122"/>
                 <a:cs typeface="Consolas" pitchFamily="34" charset="-120"/>
               </a:rPr>
-              <a:t>= '</a:t>
-            </a:r>
-            <a:r>
-              <a:rPr lang="ko-KR" altLang="en-US" sz="950" dirty="0">
-                <a:solidFill>
-                  <a:srgbClr val="E6EDF3"/>
-                </a:solidFill>
-                <a:latin typeface="Consolas" pitchFamily="34" charset="0"/>
-                <a:ea typeface="Consolas" pitchFamily="34" charset="-122"/>
-                <a:cs typeface="Consolas" pitchFamily="34" charset="-120"/>
-              </a:rPr>
-              <a:t>❌ </a:t>
-            </a:r>
-            <a:r>
-              <a:rPr lang="es-419" altLang="ko-KR" sz="950" dirty="0">
-                <a:solidFill>
-                  <a:srgbClr val="E6EDF3"/>
-                </a:solidFill>
-                <a:latin typeface="Consolas" pitchFamily="34" charset="0"/>
-                <a:ea typeface="Consolas" pitchFamily="34" charset="-122"/>
-                <a:cs typeface="Consolas" pitchFamily="34" charset="-120"/>
-              </a:rPr>
-              <a:t>FAIL' if data['fails'] &gt; 0 else '</a:t>
-            </a:r>
-            <a:r>
-              <a:rPr lang="ko-KR" altLang="en-US" sz="950" dirty="0">
-                <a:solidFill>
-                  <a:srgbClr val="E6EDF3"/>
-                </a:solidFill>
-                <a:latin typeface="Consolas" pitchFamily="34" charset="0"/>
-                <a:ea typeface="Consolas" pitchFamily="34" charset="-122"/>
-                <a:cs typeface="Consolas" pitchFamily="34" charset="-120"/>
-              </a:rPr>
-              <a:t>✅ </a:t>
-            </a:r>
-            <a:r>
-              <a:rPr lang="es-419" altLang="ko-KR" sz="950" dirty="0">
-                <a:solidFill>
-                  <a:srgbClr val="E6EDF3"/>
-                </a:solidFill>
-                <a:latin typeface="Consolas" pitchFamily="34" charset="0"/>
-                <a:ea typeface="Consolas" pitchFamily="34" charset="-122"/>
-                <a:cs typeface="Consolas" pitchFamily="34" charset="-120"/>
-              </a:rPr>
-              <a:t>PASS＇</a:t>
+              <a:t>= 'FAIL' if data['fails'] &gt; 0 else 'PASS＇</a:t>
             </a:r>
           </a:p>
           <a:p>
